--- a/MuleWatch_Presentation_IEEE_Ignite_2026.pptx
+++ b/MuleWatch_Presentation_IEEE_Ignite_2026.pptx
@@ -3148,16 +3148,16 @@
         </p:nvSpPr>
         <p:spPr>
           <a:xfrm>
-            <a:off x="731520" y="640080"/>
-            <a:ext cx="5303520" cy="365760"/>
+            <a:off x="731520" y="594360"/>
+            <a:ext cx="5852160" cy="384048"/>
           </a:xfrm>
           <a:prstGeom prst="roundRect">
             <a:avLst/>
           </a:prstGeom>
           <a:solidFill>
-            <a:srgbClr val="16213E"/>
+            <a:srgbClr val="141E37"/>
           </a:solidFill>
-          <a:ln w="12700">
+          <a:ln w="15240">
             <a:solidFill>
               <a:srgbClr val="6366F1"/>
             </a:solidFill>
@@ -3182,14 +3182,14 @@
           <a:lstStyle/>
           <a:p>
             <a:pPr algn="ctr">
-              <a:defRPr sz="1000" b="1">
-                <a:solidFill>
-                  <a:srgbClr val="06B6D4"/>
-                </a:solidFill>
-              </a:defRPr>
-            </a:pPr>
-            <a:r>
-              <a:t>⚡ IEEE IGNITE HACKATHON 2026  ·  HOST: SKIT JAIPUR</a:t>
+              <a:defRPr sz="1100" b="1">
+                <a:solidFill>
+                  <a:srgbClr val="0EA5E9"/>
+                </a:solidFill>
+              </a:defRPr>
+            </a:pPr>
+            <a:r>
+              <a:t>⚡  IEEE IGNITE HACKATHON 2026  ·  HOST: SKIT JAIPUR</a:t>
             </a:r>
           </a:p>
         </p:txBody>
@@ -3203,7 +3203,7 @@
         <p:spPr>
           <a:xfrm>
             <a:off x="731520" y="1234440"/>
-            <a:ext cx="10728655" cy="1645920"/>
+            <a:ext cx="10728655" cy="1737360"/>
           </a:xfrm>
           <a:prstGeom prst="rect">
             <a:avLst/>
@@ -3217,7 +3217,7 @@
           <a:lstStyle/>
           <a:p>
             <a:pPr>
-              <a:defRPr sz="4400" b="1">
+              <a:defRPr sz="5000" b="1">
                 <a:solidFill>
                   <a:srgbClr val="FFFFFF"/>
                 </a:solidFill>
@@ -3232,9 +3232,9 @@
               <a:spcBef>
                 <a:spcPts val="600"/>
               </a:spcBef>
-              <a:defRPr sz="1800">
-                <a:solidFill>
-                  <a:srgbClr val="06B6D4"/>
+              <a:defRPr sz="2000" b="1">
+                <a:solidFill>
+                  <a:srgbClr val="0EA5E9"/>
                 </a:solidFill>
               </a:defRPr>
             </a:pPr>
@@ -3247,14 +3247,14 @@
               <a:spcBef>
                 <a:spcPts val="800"/>
               </a:spcBef>
-              <a:defRPr sz="1200">
-                <a:solidFill>
-                  <a:srgbClr val="94A3B8"/>
-                </a:solidFill>
-              </a:defRPr>
-            </a:pPr>
-            <a:r>
-              <a:t>Autonomous threat intelligence harvesting, multimodal OCR/QR forensics, localized district risk mapping, and tamper-proof police evidence generation.</a:t>
+              <a:defRPr sz="1300">
+                <a:solidFill>
+                  <a:srgbClr val="E2E8F0"/>
+                </a:solidFill>
+              </a:defRPr>
+            </a:pPr>
+            <a:r>
+              <a:t>Proactive threat intelligence harvesting, multimodal OCR/QR forensics, localized district risk mapping, and tamper-proof police evidence generation.</a:t>
             </a:r>
           </a:p>
         </p:txBody>
@@ -3267,18 +3267,18 @@
         </p:nvSpPr>
         <p:spPr>
           <a:xfrm>
-            <a:off x="731520" y="3291840"/>
-            <a:ext cx="3383280" cy="1737360"/>
+            <a:off x="731520" y="3337560"/>
+            <a:ext cx="3410712" cy="1783080"/>
           </a:xfrm>
           <a:prstGeom prst="roundRect">
             <a:avLst/>
           </a:prstGeom>
           <a:solidFill>
-            <a:srgbClr val="16213E"/>
+            <a:srgbClr val="141E37"/>
           </a:solidFill>
-          <a:ln>
+          <a:ln w="15240">
             <a:solidFill>
-              <a:srgbClr val="2A3C5F"/>
+              <a:srgbClr val="2E4469"/>
             </a:solidFill>
           </a:ln>
         </p:spPr>
@@ -3297,13 +3297,13 @@
           </a:fontRef>
         </p:style>
         <p:txBody>
-          <a:bodyPr rtlCol="0" anchor="ctr" lIns="182880" tIns="182880" rIns="182880" bIns="182880"/>
+          <a:bodyPr rtlCol="0" anchor="ctr" lIns="201168" tIns="201168" rIns="201168" bIns="201168"/>
           <a:lstStyle/>
           <a:p>
             <a:pPr algn="ctr">
-              <a:defRPr sz="900" b="1">
-                <a:solidFill>
-                  <a:srgbClr val="06B6D4"/>
+              <a:defRPr sz="1050" b="1">
+                <a:solidFill>
+                  <a:srgbClr val="0EA5E9"/>
                 </a:solidFill>
               </a:defRPr>
             </a:pPr>
@@ -3313,7 +3313,7 @@
           </a:p>
           <a:p>
             <a:pPr>
-              <a:defRPr sz="1600" b="1">
+              <a:defRPr sz="1800" b="1">
                 <a:solidFill>
                   <a:srgbClr val="FFFFFF"/>
                 </a:solidFill>
@@ -3328,9 +3328,9 @@
               <a:spcBef>
                 <a:spcPts val="400"/>
               </a:spcBef>
-              <a:defRPr sz="1050">
-                <a:solidFill>
-                  <a:srgbClr val="94A3B8"/>
+              <a:defRPr sz="1150">
+                <a:solidFill>
+                  <a:srgbClr val="E2E8F0"/>
                 </a:solidFill>
               </a:defRPr>
             </a:pPr>
@@ -3348,18 +3348,18 @@
         </p:nvSpPr>
         <p:spPr>
           <a:xfrm>
-            <a:off x="4389120" y="3291840"/>
-            <a:ext cx="3383280" cy="1737360"/>
+            <a:off x="4389120" y="3337560"/>
+            <a:ext cx="3410712" cy="1783080"/>
           </a:xfrm>
           <a:prstGeom prst="roundRect">
             <a:avLst/>
           </a:prstGeom>
           <a:solidFill>
-            <a:srgbClr val="16213E"/>
+            <a:srgbClr val="141E37"/>
           </a:solidFill>
-          <a:ln>
+          <a:ln w="15240">
             <a:solidFill>
-              <a:srgbClr val="2A3C5F"/>
+              <a:srgbClr val="2E4469"/>
             </a:solidFill>
           </a:ln>
         </p:spPr>
@@ -3378,11 +3378,11 @@
           </a:fontRef>
         </p:style>
         <p:txBody>
-          <a:bodyPr rtlCol="0" anchor="ctr" lIns="182880" tIns="182880" rIns="182880" bIns="182880"/>
+          <a:bodyPr rtlCol="0" anchor="ctr" lIns="201168" tIns="201168" rIns="201168" bIns="201168"/>
           <a:lstStyle/>
           <a:p>
             <a:pPr algn="ctr">
-              <a:defRPr sz="900" b="1">
+              <a:defRPr sz="1050" b="1">
                 <a:solidFill>
                   <a:srgbClr val="6366F1"/>
                 </a:solidFill>
@@ -3394,7 +3394,7 @@
           </a:p>
           <a:p>
             <a:pPr>
-              <a:defRPr sz="1600" b="1">
+              <a:defRPr sz="1800" b="1">
                 <a:solidFill>
                   <a:srgbClr val="FFFFFF"/>
                 </a:solidFill>
@@ -3409,9 +3409,9 @@
               <a:spcBef>
                 <a:spcPts val="400"/>
               </a:spcBef>
-              <a:defRPr sz="1050">
-                <a:solidFill>
-                  <a:srgbClr val="94A3B8"/>
+              <a:defRPr sz="1150">
+                <a:solidFill>
+                  <a:srgbClr val="E2E8F0"/>
                 </a:solidFill>
               </a:defRPr>
             </a:pPr>
@@ -3429,18 +3429,18 @@
         </p:nvSpPr>
         <p:spPr>
           <a:xfrm>
-            <a:off x="8046720" y="3291840"/>
-            <a:ext cx="3383280" cy="1737360"/>
+            <a:off x="8046720" y="3337560"/>
+            <a:ext cx="3410712" cy="1783080"/>
           </a:xfrm>
           <a:prstGeom prst="roundRect">
             <a:avLst/>
           </a:prstGeom>
           <a:solidFill>
-            <a:srgbClr val="16213E"/>
+            <a:srgbClr val="141E37"/>
           </a:solidFill>
-          <a:ln>
+          <a:ln w="15240">
             <a:solidFill>
-              <a:srgbClr val="2A3C5F"/>
+              <a:srgbClr val="2E4469"/>
             </a:solidFill>
           </a:ln>
         </p:spPr>
@@ -3459,11 +3459,11 @@
           </a:fontRef>
         </p:style>
         <p:txBody>
-          <a:bodyPr rtlCol="0" anchor="ctr" lIns="182880" tIns="182880" rIns="182880" bIns="182880"/>
+          <a:bodyPr rtlCol="0" anchor="ctr" lIns="201168" tIns="201168" rIns="201168" bIns="201168"/>
           <a:lstStyle/>
           <a:p>
             <a:pPr algn="ctr">
-              <a:defRPr sz="900" b="1">
+              <a:defRPr sz="1050" b="1">
                 <a:solidFill>
                   <a:srgbClr val="10B981"/>
                 </a:solidFill>
@@ -3475,7 +3475,7 @@
           </a:p>
           <a:p>
             <a:pPr>
-              <a:defRPr sz="1600" b="1">
+              <a:defRPr sz="1800" b="1">
                 <a:solidFill>
                   <a:srgbClr val="FFFFFF"/>
                 </a:solidFill>
@@ -3490,9 +3490,9 @@
               <a:spcBef>
                 <a:spcPts val="400"/>
               </a:spcBef>
-              <a:defRPr sz="1050">
-                <a:solidFill>
-                  <a:srgbClr val="94A3B8"/>
+              <a:defRPr sz="1150">
+                <a:solidFill>
+                  <a:srgbClr val="E2E8F0"/>
                 </a:solidFill>
               </a:defRPr>
             </a:pPr>
@@ -3510,16 +3510,16 @@
         </p:nvSpPr>
         <p:spPr>
           <a:xfrm>
-            <a:off x="731520" y="5303520"/>
+            <a:off x="731520" y="5349240"/>
             <a:ext cx="10728655" cy="685800"/>
           </a:xfrm>
           <a:prstGeom prst="roundRect">
             <a:avLst/>
           </a:prstGeom>
           <a:solidFill>
-            <a:srgbClr val="16213E"/>
+            <a:srgbClr val="141E37"/>
           </a:solidFill>
-          <a:ln w="12700">
+          <a:ln w="19050">
             <a:solidFill>
               <a:srgbClr val="4F46E5"/>
             </a:solidFill>
@@ -3540,20 +3540,20 @@
           </a:fontRef>
         </p:style>
         <p:txBody>
-          <a:bodyPr rtlCol="0" anchor="ctr" lIns="228600" tIns="109728"/>
-          <a:lstStyle/>
-          <a:p>
-            <a:pPr algn="ctr"/>
-            <a:r>
-              <a:rPr b="1" sz="1100">
-                <a:solidFill>
-                  <a:srgbClr val="06B6D4"/>
+          <a:bodyPr rtlCol="0" anchor="ctr" lIns="274320" tIns="109728"/>
+          <a:lstStyle/>
+          <a:p>
+            <a:pPr algn="l"/>
+            <a:r>
+              <a:rPr b="1" sz="1200">
+                <a:solidFill>
+                  <a:srgbClr val="0EA5E9"/>
                 </a:solidFill>
               </a:rPr>
               <a:t>PUBLIC GITHUB REPOSITORY: </a:t>
             </a:r>
             <a:r>
-              <a:rPr sz="1100" b="1">
+              <a:rPr sz="1200" b="1">
                 <a:solidFill>
                   <a:srgbClr val="FFFFFF"/>
                 </a:solidFill>
@@ -3561,12 +3561,12 @@
               <a:t>https://github.com/Sunil-saini1818/MuleWatch  </a:t>
             </a:r>
             <a:r>
-              <a:rPr sz="1000">
+              <a:rPr sz="1100">
                 <a:solidFill>
                   <a:srgbClr val="10B981"/>
                 </a:solidFill>
               </a:rPr>
-              <a:t>[Production-Ready Fullstack Codebase · Complete Commit History]</a:t>
+              <a:t>[Production-Ready Fullstack Codebase · Complete Verified Commits]</a:t>
             </a:r>
           </a:p>
         </p:txBody>
@@ -3594,7 +3594,7 @@
           <a:lstStyle/>
           <a:p>
             <a:pPr algn="l">
-              <a:defRPr sz="900">
+              <a:defRPr sz="950">
                 <a:solidFill>
                   <a:srgbClr val="94A3B8"/>
                 </a:solidFill>
@@ -3629,9 +3629,9 @@
           <a:lstStyle/>
           <a:p>
             <a:pPr algn="r">
-              <a:defRPr sz="900" b="1">
-                <a:solidFill>
-                  <a:srgbClr val="06B6D4"/>
+              <a:defRPr sz="950" b="1">
+                <a:solidFill>
+                  <a:srgbClr val="0EA5E9"/>
                 </a:solidFill>
               </a:defRPr>
             </a:pPr>
@@ -3710,16 +3710,16 @@
         </p:nvSpPr>
         <p:spPr>
           <a:xfrm>
-            <a:off x="731520" y="365760"/>
-            <a:ext cx="4389120" cy="292608"/>
+            <a:off x="731520" y="347472"/>
+            <a:ext cx="4572000" cy="320040"/>
           </a:xfrm>
           <a:prstGeom prst="roundRect">
             <a:avLst/>
           </a:prstGeom>
           <a:solidFill>
-            <a:srgbClr val="16213E"/>
+            <a:srgbClr val="141E37"/>
           </a:solidFill>
-          <a:ln w="12700">
+          <a:ln w="15240">
             <a:solidFill>
               <a:srgbClr val="6366F1"/>
             </a:solidFill>
@@ -3744,14 +3744,14 @@
           <a:lstStyle/>
           <a:p>
             <a:pPr algn="ctr">
-              <a:defRPr sz="900" b="1">
-                <a:solidFill>
-                  <a:srgbClr val="06B6D4"/>
-                </a:solidFill>
-              </a:defRPr>
-            </a:pPr>
-            <a:r>
-              <a:t>MISSION SUMMARY · FUTURE HORIZONS</a:t>
+              <a:defRPr sz="950" b="1">
+                <a:solidFill>
+                  <a:srgbClr val="0EA5E9"/>
+                </a:solidFill>
+              </a:defRPr>
+            </a:pPr>
+            <a:r>
+              <a:t>  MISSION SUMMARY · FUTURE HORIZONS  </a:t>
             </a:r>
           </a:p>
         </p:txBody>
@@ -3764,8 +3764,8 @@
         </p:nvSpPr>
         <p:spPr>
           <a:xfrm>
-            <a:off x="731520" y="731520"/>
-            <a:ext cx="10728655" cy="868680"/>
+            <a:off x="731520" y="713232"/>
+            <a:ext cx="10728655" cy="896112"/>
           </a:xfrm>
           <a:prstGeom prst="rect">
             <a:avLst/>
@@ -3779,9 +3779,9 @@
           <a:lstStyle/>
           <a:p>
             <a:pPr>
-              <a:defRPr sz="2200" b="1">
-                <a:solidFill>
-                  <a:srgbClr val="F8FAFC"/>
+              <a:defRPr sz="2500" b="1">
+                <a:solidFill>
+                  <a:srgbClr val="FFFFFF"/>
                 </a:solidFill>
               </a:defRPr>
             </a:pPr>
@@ -3794,7 +3794,7 @@
               <a:spcBef>
                 <a:spcPts val="300"/>
               </a:spcBef>
-              <a:defRPr sz="1150">
+              <a:defRPr sz="1300">
                 <a:solidFill>
                   <a:srgbClr val="94A3B8"/>
                 </a:solidFill>
@@ -3815,17 +3815,17 @@
         <p:spPr>
           <a:xfrm>
             <a:off x="731520" y="1691640"/>
-            <a:ext cx="3383280" cy="3383280"/>
+            <a:ext cx="3429000" cy="3383280"/>
           </a:xfrm>
           <a:prstGeom prst="roundRect">
             <a:avLst/>
           </a:prstGeom>
           <a:solidFill>
-            <a:srgbClr val="16213E"/>
+            <a:srgbClr val="141E37"/>
           </a:solidFill>
-          <a:ln w="12700">
+          <a:ln w="15240">
             <a:solidFill>
-              <a:srgbClr val="2A3C5F"/>
+              <a:srgbClr val="2E4469"/>
             </a:solidFill>
           </a:ln>
         </p:spPr>
@@ -3860,7 +3860,7 @@
         <p:spPr>
           <a:xfrm>
             <a:off x="731520" y="1691640"/>
-            <a:ext cx="3383280" cy="73152"/>
+            <a:ext cx="3429000" cy="73152"/>
           </a:xfrm>
           <a:prstGeom prst="roundRect">
             <a:avLst/>
@@ -3902,8 +3902,8 @@
         </p:nvSpPr>
         <p:spPr>
           <a:xfrm>
-            <a:off x="932688" y="1874520"/>
-            <a:ext cx="2980944" cy="3063240"/>
+            <a:off x="950976" y="1874520"/>
+            <a:ext cx="2990088" cy="3063240"/>
           </a:xfrm>
           <a:prstGeom prst="rect">
             <a:avLst/>
@@ -3920,7 +3920,7 @@
               <a:spcAft>
                 <a:spcPts val="200"/>
               </a:spcAft>
-              <a:defRPr sz="900" b="1">
+              <a:defRPr sz="1000" b="1">
                 <a:solidFill>
                   <a:srgbClr val="10B981"/>
                 </a:solidFill>
@@ -3932,106 +3932,106 @@
           </a:p>
           <a:p>
             <a:pPr>
+              <a:spcAft>
+                <a:spcPts val="800"/>
+              </a:spcAft>
+              <a:defRPr sz="1600" b="1">
+                <a:solidFill>
+                  <a:srgbClr val="FFFFFF"/>
+                </a:solidFill>
+              </a:defRPr>
+            </a:pPr>
+            <a:r>
+              <a:t>Delivered Milestones</a:t>
+            </a:r>
+          </a:p>
+          <a:p>
+            <a:pPr algn="l">
               <a:spcAft>
                 <a:spcPts val="700"/>
               </a:spcAft>
-              <a:defRPr sz="1400" b="1">
-                <a:solidFill>
-                  <a:srgbClr val="F8FAFC"/>
-                </a:solidFill>
-              </a:defRPr>
-            </a:pPr>
-            <a:r>
-              <a:t>Delivered Milestones</a:t>
-            </a:r>
-          </a:p>
-          <a:p>
-            <a:pPr>
+            </a:pPr>
+            <a:r>
+              <a:rPr b="1" sz="1200">
+                <a:solidFill>
+                  <a:srgbClr val="FFFFFF"/>
+                </a:solidFill>
+              </a:rPr>
+              <a:t>•  Production Fullstack Engine: </a:t>
+            </a:r>
+            <a:r>
+              <a:rPr sz="1150">
+                <a:solidFill>
+                  <a:srgbClr val="E2E8F0"/>
+                </a:solidFill>
+              </a:rPr>
+              <a:t>FastAPI + React 18 with persistent SQLite WAL database and live telemetry.</a:t>
+            </a:r>
+          </a:p>
+          <a:p>
+            <a:pPr algn="l">
               <a:spcAft>
-                <a:spcPts val="500"/>
+                <a:spcPts val="700"/>
               </a:spcAft>
             </a:pPr>
             <a:r>
-              <a:rPr b="1" sz="1050">
-                <a:solidFill>
-                  <a:srgbClr val="F8FAFC"/>
-                </a:solidFill>
-              </a:rPr>
-              <a:t>• Production Fullstack Engine: </a:t>
-            </a:r>
-            <a:r>
-              <a:rPr sz="1000">
-                <a:solidFill>
-                  <a:srgbClr val="94A3B8"/>
-                </a:solidFill>
-              </a:rPr>
-              <a:t>FastAPI + React 18 with persistent SQLite WAL database and live telemetry.</a:t>
-            </a:r>
-          </a:p>
-          <a:p>
-            <a:pPr>
+              <a:rPr b="1" sz="1200">
+                <a:solidFill>
+                  <a:srgbClr val="FFFFFF"/>
+                </a:solidFill>
+              </a:rPr>
+              <a:t>•  Multimodal AI Pipeline: </a:t>
+            </a:r>
+            <a:r>
+              <a:rPr sz="1150">
+                <a:solidFill>
+                  <a:srgbClr val="E2E8F0"/>
+                </a:solidFill>
+              </a:rPr>
+              <a:t>Automated OCR extraction, QR decoding, and NLP heuristic threat scoring.</a:t>
+            </a:r>
+          </a:p>
+          <a:p>
+            <a:pPr algn="l">
               <a:spcAft>
-                <a:spcPts val="500"/>
+                <a:spcPts val="700"/>
               </a:spcAft>
             </a:pPr>
             <a:r>
-              <a:rPr b="1" sz="1050">
-                <a:solidFill>
-                  <a:srgbClr val="F8FAFC"/>
-                </a:solidFill>
-              </a:rPr>
-              <a:t>• Multimodal AI Pipeline: </a:t>
-            </a:r>
-            <a:r>
-              <a:rPr sz="1000">
-                <a:solidFill>
-                  <a:srgbClr val="94A3B8"/>
-                </a:solidFill>
-              </a:rPr>
-              <a:t>Automated OCR extraction, QR decoding, and NLP heuristic threat scoring.</a:t>
-            </a:r>
-          </a:p>
-          <a:p>
-            <a:pPr>
+              <a:rPr b="1" sz="1200">
+                <a:solidFill>
+                  <a:srgbClr val="FFFFFF"/>
+                </a:solidFill>
+              </a:rPr>
+              <a:t>•  Rajasthan District Map: </a:t>
+            </a:r>
+            <a:r>
+              <a:rPr sz="1150">
+                <a:solidFill>
+                  <a:srgbClr val="E2E8F0"/>
+                </a:solidFill>
+              </a:rPr>
+              <a:t>Gapless TopoJSON SVG vector map bound to localized district metrics.</a:t>
+            </a:r>
+          </a:p>
+          <a:p>
+            <a:pPr algn="l">
               <a:spcAft>
-                <a:spcPts val="500"/>
+                <a:spcPts val="700"/>
               </a:spcAft>
             </a:pPr>
             <a:r>
-              <a:rPr b="1" sz="1050">
-                <a:solidFill>
-                  <a:srgbClr val="F8FAFC"/>
-                </a:solidFill>
-              </a:rPr>
-              <a:t>• Rajasthan District Map: </a:t>
-            </a:r>
-            <a:r>
-              <a:rPr sz="1000">
-                <a:solidFill>
-                  <a:srgbClr val="94A3B8"/>
-                </a:solidFill>
-              </a:rPr>
-              <a:t>Gapless TopoJSON SVG vector map bound to localized district metrics.</a:t>
-            </a:r>
-          </a:p>
-          <a:p>
-            <a:pPr>
-              <a:spcAft>
-                <a:spcPts val="500"/>
-              </a:spcAft>
-            </a:pPr>
-            <a:r>
-              <a:rPr b="1" sz="1050">
-                <a:solidFill>
-                  <a:srgbClr val="F8FAFC"/>
-                </a:solidFill>
-              </a:rPr>
-              <a:t>• Cyber Cell Dispatch Queue: </a:t>
-            </a:r>
-            <a:r>
-              <a:rPr sz="1000">
-                <a:solidFill>
-                  <a:srgbClr val="94A3B8"/>
+              <a:rPr b="1" sz="1200">
+                <a:solidFill>
+                  <a:srgbClr val="FFFFFF"/>
+                </a:solidFill>
+              </a:rPr>
+              <a:t>•  Cyber Cell Dispatch Queue: </a:t>
+            </a:r>
+            <a:r>
+              <a:rPr sz="1150">
+                <a:solidFill>
+                  <a:srgbClr val="E2E8F0"/>
                 </a:solidFill>
               </a:rPr>
               <a:t>1-click I4C dispatch, bank lien notices, and SHA-256 PDF dossiers.</a:t>
@@ -4047,18 +4047,18 @@
         </p:nvSpPr>
         <p:spPr>
           <a:xfrm>
-            <a:off x="4389120" y="1691640"/>
-            <a:ext cx="3383280" cy="3383280"/>
+            <a:off x="4370832" y="1691640"/>
+            <a:ext cx="3429000" cy="3383280"/>
           </a:xfrm>
           <a:prstGeom prst="roundRect">
             <a:avLst/>
           </a:prstGeom>
           <a:solidFill>
-            <a:srgbClr val="16213E"/>
+            <a:srgbClr val="141E37"/>
           </a:solidFill>
-          <a:ln w="12700">
+          <a:ln w="15240">
             <a:solidFill>
-              <a:srgbClr val="2A3C5F"/>
+              <a:srgbClr val="2E4469"/>
             </a:solidFill>
           </a:ln>
         </p:spPr>
@@ -4092,14 +4092,14 @@
         </p:nvSpPr>
         <p:spPr>
           <a:xfrm>
-            <a:off x="4389120" y="1691640"/>
-            <a:ext cx="3383280" cy="73152"/>
+            <a:off x="4370832" y="1691640"/>
+            <a:ext cx="3429000" cy="73152"/>
           </a:xfrm>
           <a:prstGeom prst="roundRect">
             <a:avLst/>
           </a:prstGeom>
           <a:solidFill>
-            <a:srgbClr val="06B6D4"/>
+            <a:srgbClr val="0EA5E9"/>
           </a:solidFill>
           <a:ln>
             <a:noFill/>
@@ -4136,7 +4136,7 @@
         <p:spPr>
           <a:xfrm>
             <a:off x="4590288" y="1874520"/>
-            <a:ext cx="2980944" cy="3063240"/>
+            <a:ext cx="2990088" cy="3063240"/>
           </a:xfrm>
           <a:prstGeom prst="rect">
             <a:avLst/>
@@ -4153,9 +4153,9 @@
               <a:spcAft>
                 <a:spcPts val="200"/>
               </a:spcAft>
-              <a:defRPr sz="900" b="1">
-                <a:solidFill>
-                  <a:srgbClr val="06B6D4"/>
+              <a:defRPr sz="1000" b="1">
+                <a:solidFill>
+                  <a:srgbClr val="0EA5E9"/>
                 </a:solidFill>
               </a:defRPr>
             </a:pPr>
@@ -4165,106 +4165,106 @@
           </a:p>
           <a:p>
             <a:pPr>
+              <a:spcAft>
+                <a:spcPts val="800"/>
+              </a:spcAft>
+              <a:defRPr sz="1600" b="1">
+                <a:solidFill>
+                  <a:srgbClr val="FFFFFF"/>
+                </a:solidFill>
+              </a:defRPr>
+            </a:pPr>
+            <a:r>
+              <a:t>Immediate Roadmap</a:t>
+            </a:r>
+          </a:p>
+          <a:p>
+            <a:pPr algn="l">
               <a:spcAft>
                 <a:spcPts val="700"/>
               </a:spcAft>
-              <a:defRPr sz="1400" b="1">
-                <a:solidFill>
-                  <a:srgbClr val="F8FAFC"/>
-                </a:solidFill>
-              </a:defRPr>
-            </a:pPr>
-            <a:r>
-              <a:t>Immediate Roadmap</a:t>
-            </a:r>
-          </a:p>
-          <a:p>
-            <a:pPr>
+            </a:pPr>
+            <a:r>
+              <a:rPr b="1" sz="1200">
+                <a:solidFill>
+                  <a:srgbClr val="FFFFFF"/>
+                </a:solidFill>
+              </a:rPr>
+              <a:t>•  WhatsApp &amp; Dark Web Crawlers: </a:t>
+            </a:r>
+            <a:r>
+              <a:rPr sz="1150">
+                <a:solidFill>
+                  <a:srgbClr val="E2E8F0"/>
+                </a:solidFill>
+              </a:rPr>
+              <a:t>Expanding autonomous crawlers to WhatsApp Business channels and Tor forums.</a:t>
+            </a:r>
+          </a:p>
+          <a:p>
+            <a:pPr algn="l">
               <a:spcAft>
-                <a:spcPts val="500"/>
+                <a:spcPts val="700"/>
               </a:spcAft>
             </a:pPr>
             <a:r>
-              <a:rPr b="1" sz="1050">
-                <a:solidFill>
-                  <a:srgbClr val="F8FAFC"/>
-                </a:solidFill>
-              </a:rPr>
-              <a:t>• WhatsApp &amp; Dark Web Crawlers: </a:t>
-            </a:r>
-            <a:r>
-              <a:rPr sz="1000">
-                <a:solidFill>
-                  <a:srgbClr val="94A3B8"/>
-                </a:solidFill>
-              </a:rPr>
-              <a:t>Expanding autonomous crawlers to WhatsApp Business channels and Tor forums.</a:t>
-            </a:r>
-          </a:p>
-          <a:p>
-            <a:pPr>
+              <a:rPr b="1" sz="1200">
+                <a:solidFill>
+                  <a:srgbClr val="FFFFFF"/>
+                </a:solidFill>
+              </a:rPr>
+              <a:t>•  Direct NPCI / RBI API Hooks: </a:t>
+            </a:r>
+            <a:r>
+              <a:rPr sz="1150">
+                <a:solidFill>
+                  <a:srgbClr val="E2E8F0"/>
+                </a:solidFill>
+              </a:rPr>
+              <a:t>Real-time automated account freezing via official banking nodal gateways.</a:t>
+            </a:r>
+          </a:p>
+          <a:p>
+            <a:pPr algn="l">
               <a:spcAft>
-                <a:spcPts val="500"/>
+                <a:spcPts val="700"/>
               </a:spcAft>
             </a:pPr>
             <a:r>
-              <a:rPr b="1" sz="1050">
-                <a:solidFill>
-                  <a:srgbClr val="F8FAFC"/>
-                </a:solidFill>
-              </a:rPr>
-              <a:t>• Direct NPCI / RBI API Hooks: </a:t>
-            </a:r>
-            <a:r>
-              <a:rPr sz="1000">
-                <a:solidFill>
-                  <a:srgbClr val="94A3B8"/>
-                </a:solidFill>
-              </a:rPr>
-              <a:t>Real-time automated account freezing via official banking nodal gateways.</a:t>
-            </a:r>
-          </a:p>
-          <a:p>
-            <a:pPr>
+              <a:rPr b="1" sz="1200">
+                <a:solidFill>
+                  <a:srgbClr val="FFFFFF"/>
+                </a:solidFill>
+              </a:rPr>
+              <a:t>•  Indic LLM Dialect Fine-Tuning: </a:t>
+            </a:r>
+            <a:r>
+              <a:rPr sz="1150">
+                <a:solidFill>
+                  <a:srgbClr val="E2E8F0"/>
+                </a:solidFill>
+              </a:rPr>
+              <a:t>Specialized NLP models for regional Indian slang, Romanized Hindi, and evasive code-words.</a:t>
+            </a:r>
+          </a:p>
+          <a:p>
+            <a:pPr algn="l">
               <a:spcAft>
-                <a:spcPts val="500"/>
+                <a:spcPts val="700"/>
               </a:spcAft>
             </a:pPr>
             <a:r>
-              <a:rPr b="1" sz="1050">
-                <a:solidFill>
-                  <a:srgbClr val="F8FAFC"/>
-                </a:solidFill>
-              </a:rPr>
-              <a:t>• Indic LLM Dialect Fine-Tuning: </a:t>
-            </a:r>
-            <a:r>
-              <a:rPr sz="1000">
-                <a:solidFill>
-                  <a:srgbClr val="94A3B8"/>
-                </a:solidFill>
-              </a:rPr>
-              <a:t>Specialized NLP models for regional Indian slang, Romanized Hindi, and evasive code-words.</a:t>
-            </a:r>
-          </a:p>
-          <a:p>
-            <a:pPr>
-              <a:spcAft>
-                <a:spcPts val="500"/>
-              </a:spcAft>
-            </a:pPr>
-            <a:r>
-              <a:rPr b="1" sz="1050">
-                <a:solidFill>
-                  <a:srgbClr val="F8FAFC"/>
-                </a:solidFill>
-              </a:rPr>
-              <a:t>• Automated Sec 65B Certificates: </a:t>
-            </a:r>
-            <a:r>
-              <a:rPr sz="1000">
-                <a:solidFill>
-                  <a:srgbClr val="94A3B8"/>
+              <a:rPr b="1" sz="1200">
+                <a:solidFill>
+                  <a:srgbClr val="FFFFFF"/>
+                </a:solidFill>
+              </a:rPr>
+              <a:t>•  Automated Sec 65B Certificates: </a:t>
+            </a:r>
+            <a:r>
+              <a:rPr sz="1150">
+                <a:solidFill>
+                  <a:srgbClr val="E2E8F0"/>
                 </a:solidFill>
               </a:rPr>
               <a:t>Automated digital signing and hash stamping for formal court filings.</a:t>
@@ -4280,18 +4280,18 @@
         </p:nvSpPr>
         <p:spPr>
           <a:xfrm>
-            <a:off x="8046720" y="1691640"/>
-            <a:ext cx="3413455" cy="3383280"/>
+            <a:off x="8028431" y="1691640"/>
+            <a:ext cx="3429000" cy="3383280"/>
           </a:xfrm>
           <a:prstGeom prst="roundRect">
             <a:avLst/>
           </a:prstGeom>
           <a:solidFill>
-            <a:srgbClr val="16213E"/>
+            <a:srgbClr val="141E37"/>
           </a:solidFill>
-          <a:ln w="12700">
+          <a:ln w="15240">
             <a:solidFill>
-              <a:srgbClr val="2A3C5F"/>
+              <a:srgbClr val="2E4469"/>
             </a:solidFill>
           </a:ln>
         </p:spPr>
@@ -4325,8 +4325,8 @@
         </p:nvSpPr>
         <p:spPr>
           <a:xfrm>
-            <a:off x="8046720" y="1691640"/>
-            <a:ext cx="3413455" cy="73152"/>
+            <a:off x="8028431" y="1691640"/>
+            <a:ext cx="3429000" cy="73152"/>
           </a:xfrm>
           <a:prstGeom prst="roundRect">
             <a:avLst/>
@@ -4368,8 +4368,8 @@
         </p:nvSpPr>
         <p:spPr>
           <a:xfrm>
-            <a:off x="8247888" y="1874520"/>
-            <a:ext cx="3011119" cy="3063240"/>
+            <a:off x="8247887" y="1874520"/>
+            <a:ext cx="2990088" cy="3063240"/>
           </a:xfrm>
           <a:prstGeom prst="rect">
             <a:avLst/>
@@ -4386,7 +4386,7 @@
               <a:spcAft>
                 <a:spcPts val="200"/>
               </a:spcAft>
-              <a:defRPr sz="900" b="1">
+              <a:defRPr sz="1000" b="1">
                 <a:solidFill>
                   <a:srgbClr val="6366F1"/>
                 </a:solidFill>
@@ -4398,106 +4398,106 @@
           </a:p>
           <a:p>
             <a:pPr>
+              <a:spcAft>
+                <a:spcPts val="800"/>
+              </a:spcAft>
+              <a:defRPr sz="1600" b="1">
+                <a:solidFill>
+                  <a:srgbClr val="FFFFFF"/>
+                </a:solidFill>
+              </a:defRPr>
+            </a:pPr>
+            <a:r>
+              <a:t>Team &amp; Repository</a:t>
+            </a:r>
+          </a:p>
+          <a:p>
+            <a:pPr algn="l">
               <a:spcAft>
                 <a:spcPts val="700"/>
               </a:spcAft>
-              <a:defRPr sz="1400" b="1">
-                <a:solidFill>
-                  <a:srgbClr val="F8FAFC"/>
-                </a:solidFill>
-              </a:defRPr>
-            </a:pPr>
-            <a:r>
-              <a:t>Team &amp; Repository</a:t>
-            </a:r>
-          </a:p>
-          <a:p>
-            <a:pPr>
+            </a:pPr>
+            <a:r>
+              <a:rPr b="1" sz="1200">
+                <a:solidFill>
+                  <a:srgbClr val="FFFFFF"/>
+                </a:solidFill>
+              </a:rPr>
+              <a:t>•  Team Capycoders: </a:t>
+            </a:r>
+            <a:r>
+              <a:rPr sz="1150">
+                <a:solidFill>
+                  <a:srgbClr val="E2E8F0"/>
+                </a:solidFill>
+              </a:rPr>
+              <a:t>Developers dedicated to building high-impact cyber defense and financial integrity tooling.</a:t>
+            </a:r>
+          </a:p>
+          <a:p>
+            <a:pPr algn="l">
               <a:spcAft>
-                <a:spcPts val="500"/>
+                <a:spcPts val="700"/>
               </a:spcAft>
             </a:pPr>
             <a:r>
-              <a:rPr b="1" sz="1050">
-                <a:solidFill>
-                  <a:srgbClr val="F8FAFC"/>
-                </a:solidFill>
-              </a:rPr>
-              <a:t>• Team Capycoders: </a:t>
-            </a:r>
-            <a:r>
-              <a:rPr sz="1000">
-                <a:solidFill>
-                  <a:srgbClr val="94A3B8"/>
-                </a:solidFill>
-              </a:rPr>
-              <a:t>Developers dedicated to building high-impact cyber defense and financial integrity tooling.</a:t>
-            </a:r>
-          </a:p>
-          <a:p>
-            <a:pPr>
+              <a:rPr b="1" sz="1200">
+                <a:solidFill>
+                  <a:srgbClr val="FFFFFF"/>
+                </a:solidFill>
+              </a:rPr>
+              <a:t>•  Host Institution: </a:t>
+            </a:r>
+            <a:r>
+              <a:rPr sz="1150">
+                <a:solidFill>
+                  <a:srgbClr val="E2E8F0"/>
+                </a:solidFill>
+              </a:rPr>
+              <a:t>SKIT Jaipur (Swami Keshvanand Institute of Technology)</a:t>
+            </a:r>
+          </a:p>
+          <a:p>
+            <a:pPr algn="l">
               <a:spcAft>
-                <a:spcPts val="500"/>
+                <a:spcPts val="700"/>
               </a:spcAft>
             </a:pPr>
             <a:r>
-              <a:rPr b="1" sz="1050">
-                <a:solidFill>
-                  <a:srgbClr val="F8FAFC"/>
-                </a:solidFill>
-              </a:rPr>
-              <a:t>• Host Institution: </a:t>
-            </a:r>
-            <a:r>
-              <a:rPr sz="1000">
-                <a:solidFill>
-                  <a:srgbClr val="94A3B8"/>
-                </a:solidFill>
-              </a:rPr>
-              <a:t>SKIT Jaipur (Swami Keshvanand Institute of Technology)</a:t>
-            </a:r>
-          </a:p>
-          <a:p>
-            <a:pPr>
+              <a:rPr b="1" sz="1200">
+                <a:solidFill>
+                  <a:srgbClr val="FFFFFF"/>
+                </a:solidFill>
+              </a:rPr>
+              <a:t>•  Event Context: </a:t>
+            </a:r>
+            <a:r>
+              <a:rPr sz="1150">
+                <a:solidFill>
+                  <a:srgbClr val="E2E8F0"/>
+                </a:solidFill>
+              </a:rPr>
+              <a:t>IEEE Ignite Hackathon 2026 · Problem ID: SKIT002</a:t>
+            </a:r>
+          </a:p>
+          <a:p>
+            <a:pPr algn="l">
               <a:spcAft>
-                <a:spcPts val="500"/>
+                <a:spcPts val="700"/>
               </a:spcAft>
             </a:pPr>
             <a:r>
-              <a:rPr b="1" sz="1050">
-                <a:solidFill>
-                  <a:srgbClr val="F8FAFC"/>
-                </a:solidFill>
-              </a:rPr>
-              <a:t>• Event Context: </a:t>
-            </a:r>
-            <a:r>
-              <a:rPr sz="1000">
-                <a:solidFill>
-                  <a:srgbClr val="94A3B8"/>
-                </a:solidFill>
-              </a:rPr>
-              <a:t>IEEE Ignite Hackathon 2026 · Problem ID: SKIT002</a:t>
-            </a:r>
-          </a:p>
-          <a:p>
-            <a:pPr>
-              <a:spcAft>
-                <a:spcPts val="500"/>
-              </a:spcAft>
-            </a:pPr>
-            <a:r>
-              <a:rPr b="1" sz="1050">
-                <a:solidFill>
-                  <a:srgbClr val="F8FAFC"/>
-                </a:solidFill>
-              </a:rPr>
-              <a:t>• GitHub Repository: </a:t>
-            </a:r>
-            <a:r>
-              <a:rPr sz="1000">
-                <a:solidFill>
-                  <a:srgbClr val="94A3B8"/>
+              <a:rPr b="1" sz="1200">
+                <a:solidFill>
+                  <a:srgbClr val="FFFFFF"/>
+                </a:solidFill>
+              </a:rPr>
+              <a:t>•  GitHub Repository: </a:t>
+            </a:r>
+            <a:r>
+              <a:rPr sz="1150">
+                <a:solidFill>
+                  <a:srgbClr val="E2E8F0"/>
                 </a:solidFill>
               </a:rPr>
               <a:t>github.com/Sunil-saini1818/MuleWatch (Public, active commit history)</a:t>
@@ -4520,11 +4520,11 @@
             <a:avLst/>
           </a:prstGeom>
           <a:solidFill>
-            <a:srgbClr val="16213E"/>
+            <a:srgbClr val="141E37"/>
           </a:solidFill>
           <a:ln w="19050">
             <a:solidFill>
-              <a:srgbClr val="06B6D4"/>
+              <a:srgbClr val="0EA5E9"/>
             </a:solidFill>
           </a:ln>
         </p:spPr>
@@ -4543,11 +4543,11 @@
           </a:fontRef>
         </p:style>
         <p:txBody>
-          <a:bodyPr rtlCol="0" anchor="ctr" tIns="137160" lIns="274320"/>
+          <a:bodyPr rtlCol="0" anchor="ctr" tIns="164592" lIns="274320"/>
           <a:lstStyle/>
           <a:p>
             <a:pPr algn="ctr">
-              <a:defRPr sz="1400" b="1">
+              <a:defRPr sz="1600" b="1">
                 <a:solidFill>
                   <a:srgbClr val="FFFFFF"/>
                 </a:solidFill>
@@ -4558,13 +4558,13 @@
             </a:r>
           </a:p>
           <a:p>
-            <a:pPr>
+            <a:pPr algn="ctr">
               <a:spcBef>
-                <a:spcPts val="300"/>
+                <a:spcPts val="400"/>
               </a:spcBef>
-              <a:defRPr sz="1100">
-                <a:solidFill>
-                  <a:srgbClr val="94A3B8"/>
+              <a:defRPr sz="1250">
+                <a:solidFill>
+                  <a:srgbClr val="E2E8F0"/>
                 </a:solidFill>
               </a:defRPr>
             </a:pPr>
@@ -4597,7 +4597,7 @@
           <a:lstStyle/>
           <a:p>
             <a:pPr algn="l">
-              <a:defRPr sz="900">
+              <a:defRPr sz="950">
                 <a:solidFill>
                   <a:srgbClr val="94A3B8"/>
                 </a:solidFill>
@@ -4632,9 +4632,9 @@
           <a:lstStyle/>
           <a:p>
             <a:pPr algn="r">
-              <a:defRPr sz="900" b="1">
-                <a:solidFill>
-                  <a:srgbClr val="06B6D4"/>
+              <a:defRPr sz="950" b="1">
+                <a:solidFill>
+                  <a:srgbClr val="0EA5E9"/>
                 </a:solidFill>
               </a:defRPr>
             </a:pPr>
@@ -4713,8 +4713,8 @@
         </p:nvSpPr>
         <p:spPr>
           <a:xfrm>
-            <a:off x="731520" y="365760"/>
-            <a:ext cx="4389120" cy="292608"/>
+            <a:off x="731520" y="347472"/>
+            <a:ext cx="4572000" cy="320040"/>
           </a:xfrm>
           <a:prstGeom prst="roundRect">
             <a:avLst/>
@@ -4722,7 +4722,7 @@
           <a:solidFill>
             <a:srgbClr val="EEF2FF"/>
           </a:solidFill>
-          <a:ln w="12700">
+          <a:ln w="15240">
             <a:solidFill>
               <a:srgbClr val="4F46E5"/>
             </a:solidFill>
@@ -4747,14 +4747,14 @@
           <a:lstStyle/>
           <a:p>
             <a:pPr algn="ctr">
-              <a:defRPr sz="900" b="1">
+              <a:defRPr sz="950" b="1">
                 <a:solidFill>
                   <a:srgbClr val="4F46E5"/>
                 </a:solidFill>
               </a:defRPr>
             </a:pPr>
             <a:r>
-              <a:t>PROBLEM ANALYSIS · THE THREAT LANDSCAPE</a:t>
+              <a:t>  PROBLEM ANALYSIS · THE THREAT LANDSCAPE  </a:t>
             </a:r>
           </a:p>
         </p:txBody>
@@ -4767,8 +4767,8 @@
         </p:nvSpPr>
         <p:spPr>
           <a:xfrm>
-            <a:off x="731520" y="731520"/>
-            <a:ext cx="10728655" cy="868680"/>
+            <a:off x="731520" y="713232"/>
+            <a:ext cx="10728655" cy="896112"/>
           </a:xfrm>
           <a:prstGeom prst="rect">
             <a:avLst/>
@@ -4782,7 +4782,7 @@
           <a:lstStyle/>
           <a:p>
             <a:pPr>
-              <a:defRPr sz="2200" b="1">
+              <a:defRPr sz="2500" b="1">
                 <a:solidFill>
                   <a:srgbClr val="0F172A"/>
                 </a:solidFill>
@@ -4797,9 +4797,9 @@
               <a:spcBef>
                 <a:spcPts val="300"/>
               </a:spcBef>
-              <a:defRPr sz="1150">
-                <a:solidFill>
-                  <a:srgbClr val="64748B"/>
+              <a:defRPr sz="1300">
+                <a:solidFill>
+                  <a:srgbClr val="334155"/>
                 </a:solidFill>
               </a:defRPr>
             </a:pPr>
@@ -4826,9 +4826,9 @@
           <a:solidFill>
             <a:srgbClr val="FFFFFF"/>
           </a:solidFill>
-          <a:ln w="12700">
+          <a:ln w="15240">
             <a:solidFill>
-              <a:srgbClr val="E2E8F0"/>
+              <a:srgbClr val="DAE1EB"/>
             </a:solidFill>
           </a:ln>
         </p:spPr>
@@ -4905,8 +4905,8 @@
         </p:nvSpPr>
         <p:spPr>
           <a:xfrm>
-            <a:off x="932688" y="1874520"/>
-            <a:ext cx="4809744" cy="2971800"/>
+            <a:off x="950976" y="1874520"/>
+            <a:ext cx="4773168" cy="2971800"/>
           </a:xfrm>
           <a:prstGeom prst="rect">
             <a:avLst/>
@@ -4923,7 +4923,7 @@
               <a:spcAft>
                 <a:spcPts val="200"/>
               </a:spcAft>
-              <a:defRPr sz="900" b="1">
+              <a:defRPr sz="1000" b="1">
                 <a:solidFill>
                   <a:srgbClr val="DC2626"/>
                 </a:solidFill>
@@ -4935,106 +4935,106 @@
           </a:p>
           <a:p>
             <a:pPr>
+              <a:spcAft>
+                <a:spcPts val="800"/>
+              </a:spcAft>
+              <a:defRPr sz="1600" b="1">
+                <a:solidFill>
+                  <a:srgbClr val="0F172A"/>
+                </a:solidFill>
+              </a:defRPr>
+            </a:pPr>
+            <a:r>
+              <a:t>The Underground Syndicate Model</a:t>
+            </a:r>
+          </a:p>
+          <a:p>
+            <a:pPr algn="l">
               <a:spcAft>
                 <a:spcPts val="700"/>
               </a:spcAft>
-              <a:defRPr sz="1400" b="1">
+            </a:pPr>
+            <a:r>
+              <a:rPr b="1" sz="1200">
                 <a:solidFill>
                   <a:srgbClr val="0F172A"/>
                 </a:solidFill>
-              </a:defRPr>
-            </a:pPr>
-            <a:r>
-              <a:t>The Underground Syndicate Model</a:t>
-            </a:r>
-          </a:p>
-          <a:p>
-            <a:pPr>
+              </a:rPr>
+              <a:t>•  Proliferation of Social Adverts: </a:t>
+            </a:r>
+            <a:r>
+              <a:rPr sz="1150">
+                <a:solidFill>
+                  <a:srgbClr val="334155"/>
+                </a:solidFill>
+              </a:rPr>
+              <a:t>Fraud rings openly advertise on Telegram, WhatsApp, Facebook, and forums offering cash for 'unused' bank accounts and UPI IDs.</a:t>
+            </a:r>
+          </a:p>
+          <a:p>
+            <a:pPr algn="l">
               <a:spcAft>
-                <a:spcPts val="500"/>
+                <a:spcPts val="700"/>
               </a:spcAft>
             </a:pPr>
             <a:r>
-              <a:rPr b="1" sz="1050">
+              <a:rPr b="1" sz="1200">
                 <a:solidFill>
                   <a:srgbClr val="0F172A"/>
                 </a:solidFill>
               </a:rPr>
-              <a:t>• Proliferation of Social Adverts: </a:t>
-            </a:r>
-            <a:r>
-              <a:rPr sz="1000">
-                <a:solidFill>
-                  <a:srgbClr val="64748B"/>
-                </a:solidFill>
-              </a:rPr>
-              <a:t>Fraud rings openly advertise on Telegram, WhatsApp, Facebook, and forums offering cash for 'unused' bank accounts and UPI IDs.</a:t>
-            </a:r>
-          </a:p>
-          <a:p>
-            <a:pPr>
+              <a:t>•  Commercialized Money Laundering: </a:t>
+            </a:r>
+            <a:r>
+              <a:rPr sz="1150">
+                <a:solidFill>
+                  <a:srgbClr val="334155"/>
+                </a:solidFill>
+              </a:rPr>
+              <a:t>Accounts are leased at 5% to 15% commission or purchased outright to layer proceeds from investment, gaming, and loan scams.</a:t>
+            </a:r>
+          </a:p>
+          <a:p>
+            <a:pPr algn="l">
               <a:spcAft>
-                <a:spcPts val="500"/>
+                <a:spcPts val="700"/>
               </a:spcAft>
             </a:pPr>
             <a:r>
-              <a:rPr b="1" sz="1050">
+              <a:rPr b="1" sz="1200">
                 <a:solidFill>
                   <a:srgbClr val="0F172A"/>
                 </a:solidFill>
               </a:rPr>
-              <a:t>• Commercialized Money Laundering: </a:t>
-            </a:r>
-            <a:r>
-              <a:rPr sz="1000">
-                <a:solidFill>
-                  <a:srgbClr val="64748B"/>
-                </a:solidFill>
-              </a:rPr>
-              <a:t>Accounts are leased at 5% to 15% commission or purchased outright to layer proceeds from investment, gaming, and loan scams.</a:t>
-            </a:r>
-          </a:p>
-          <a:p>
-            <a:pPr>
+              <a:t>•  Ultra-Rapid Churning &amp; Evasion: </a:t>
+            </a:r>
+            <a:r>
+              <a:rPr sz="1150">
+                <a:solidFill>
+                  <a:srgbClr val="334155"/>
+                </a:solidFill>
+              </a:rPr>
+              <a:t>Syndicates discard channels, burn SIMs, and cycle UPI QR codes within hours of laundering dirty funds.</a:t>
+            </a:r>
+          </a:p>
+          <a:p>
+            <a:pPr algn="l">
               <a:spcAft>
-                <a:spcPts val="500"/>
+                <a:spcPts val="700"/>
               </a:spcAft>
             </a:pPr>
             <a:r>
-              <a:rPr b="1" sz="1050">
+              <a:rPr b="1" sz="1200">
                 <a:solidFill>
                   <a:srgbClr val="0F172A"/>
                 </a:solidFill>
               </a:rPr>
-              <a:t>• Ultra-Rapid Churning &amp; Evasion: </a:t>
-            </a:r>
-            <a:r>
-              <a:rPr sz="1000">
-                <a:solidFill>
-                  <a:srgbClr val="64748B"/>
-                </a:solidFill>
-              </a:rPr>
-              <a:t>Syndicates discard channels, burn SIMs, and cycle UPI QR codes within hours of laundering dirty funds.</a:t>
-            </a:r>
-          </a:p>
-          <a:p>
-            <a:pPr>
-              <a:spcAft>
-                <a:spcPts val="500"/>
-              </a:spcAft>
-            </a:pPr>
-            <a:r>
-              <a:rPr b="1" sz="1050">
-                <a:solidFill>
-                  <a:srgbClr val="0F172A"/>
-                </a:solidFill>
-              </a:rPr>
-              <a:t>• Vulnerable Demographics Target: </a:t>
-            </a:r>
-            <a:r>
-              <a:rPr sz="1000">
-                <a:solidFill>
-                  <a:srgbClr val="64748B"/>
+              <a:t>•  Vulnerable Demographics Target: </a:t>
+            </a:r>
+            <a:r>
+              <a:rPr sz="1150">
+                <a:solidFill>
+                  <a:srgbClr val="334155"/>
                 </a:solidFill>
               </a:rPr>
               <a:t>Students and unemployed youths are enticed by 'easy work-from-home' earnings, unknowingly becoming criminal accomplices.</a:t>
@@ -5051,7 +5051,7 @@
         <p:spPr>
           <a:xfrm>
             <a:off x="6217920" y="1691640"/>
-            <a:ext cx="5212080" cy="3291840"/>
+            <a:ext cx="5242255" cy="3291840"/>
           </a:xfrm>
           <a:prstGeom prst="roundRect">
             <a:avLst/>
@@ -5059,9 +5059,9 @@
           <a:solidFill>
             <a:srgbClr val="FFFFFF"/>
           </a:solidFill>
-          <a:ln w="12700">
+          <a:ln w="15240">
             <a:solidFill>
-              <a:srgbClr val="E2E8F0"/>
+              <a:srgbClr val="DAE1EB"/>
             </a:solidFill>
           </a:ln>
         </p:spPr>
@@ -5096,7 +5096,7 @@
         <p:spPr>
           <a:xfrm>
             <a:off x="6217920" y="1691640"/>
-            <a:ext cx="5212080" cy="73152"/>
+            <a:ext cx="5242255" cy="73152"/>
           </a:xfrm>
           <a:prstGeom prst="roundRect">
             <a:avLst/>
@@ -5138,8 +5138,8 @@
         </p:nvSpPr>
         <p:spPr>
           <a:xfrm>
-            <a:off x="6419088" y="1874520"/>
-            <a:ext cx="4809744" cy="2971800"/>
+            <a:off x="6437376" y="1874520"/>
+            <a:ext cx="4803343" cy="2971800"/>
           </a:xfrm>
           <a:prstGeom prst="rect">
             <a:avLst/>
@@ -5156,7 +5156,7 @@
               <a:spcAft>
                 <a:spcPts val="200"/>
               </a:spcAft>
-              <a:defRPr sz="900" b="1">
+              <a:defRPr sz="1000" b="1">
                 <a:solidFill>
                   <a:srgbClr val="4F46E5"/>
                 </a:solidFill>
@@ -5168,106 +5168,106 @@
           </a:p>
           <a:p>
             <a:pPr>
+              <a:spcAft>
+                <a:spcPts val="800"/>
+              </a:spcAft>
+              <a:defRPr sz="1600" b="1">
+                <a:solidFill>
+                  <a:srgbClr val="0F172A"/>
+                </a:solidFill>
+              </a:defRPr>
+            </a:pPr>
+            <a:r>
+              <a:t>Existing Law Enforcement Bottlenecks</a:t>
+            </a:r>
+          </a:p>
+          <a:p>
+            <a:pPr algn="l">
               <a:spcAft>
                 <a:spcPts val="700"/>
               </a:spcAft>
-              <a:defRPr sz="1400" b="1">
+            </a:pPr>
+            <a:r>
+              <a:rPr b="1" sz="1200">
                 <a:solidFill>
                   <a:srgbClr val="0F172A"/>
                 </a:solidFill>
-              </a:defRPr>
-            </a:pPr>
-            <a:r>
-              <a:t>Existing Law Enforcement Bottlenecks</a:t>
-            </a:r>
-          </a:p>
-          <a:p>
-            <a:pPr>
+              </a:rPr>
+              <a:t>•  Manual &amp; Fragmented Monitoring: </a:t>
+            </a:r>
+            <a:r>
+              <a:rPr sz="1150">
+                <a:solidFill>
+                  <a:srgbClr val="334155"/>
+                </a:solidFill>
+              </a:rPr>
+              <a:t>Police personnel manually monitor social media—a reactive, unsustainable strategy facing millions of posts daily.</a:t>
+            </a:r>
+          </a:p>
+          <a:p>
+            <a:pPr algn="l">
               <a:spcAft>
-                <a:spcPts val="500"/>
+                <a:spcPts val="700"/>
               </a:spcAft>
             </a:pPr>
             <a:r>
-              <a:rPr b="1" sz="1050">
+              <a:rPr b="1" sz="1200">
                 <a:solidFill>
                   <a:srgbClr val="0F172A"/>
                 </a:solidFill>
               </a:rPr>
-              <a:t>• Manual &amp; Fragmented Monitoring: </a:t>
-            </a:r>
-            <a:r>
-              <a:rPr sz="1000">
-                <a:solidFill>
-                  <a:srgbClr val="64748B"/>
-                </a:solidFill>
-              </a:rPr>
-              <a:t>Police personnel manually monitor social media—a reactive, unsustainable strategy facing millions of posts daily.</a:t>
-            </a:r>
-          </a:p>
-          <a:p>
-            <a:pPr>
+              <a:t>•  Multimodal Obfuscation: </a:t>
+            </a:r>
+            <a:r>
+              <a:rPr sz="1150">
+                <a:solidFill>
+                  <a:srgbClr val="334155"/>
+                </a:solidFill>
+              </a:rPr>
+              <a:t>Fraudsters conceal UPI handles and bank details inside image banners and QR codes, completely evading keyword text filters.</a:t>
+            </a:r>
+          </a:p>
+          <a:p>
+            <a:pPr algn="l">
               <a:spcAft>
-                <a:spcPts val="500"/>
+                <a:spcPts val="700"/>
               </a:spcAft>
             </a:pPr>
             <a:r>
-              <a:rPr b="1" sz="1050">
+              <a:rPr b="1" sz="1200">
                 <a:solidFill>
                   <a:srgbClr val="0F172A"/>
                 </a:solidFill>
               </a:rPr>
-              <a:t>• Multimodal Obfuscation: </a:t>
-            </a:r>
-            <a:r>
-              <a:rPr sz="1000">
-                <a:solidFill>
-                  <a:srgbClr val="64748B"/>
-                </a:solidFill>
-              </a:rPr>
-              <a:t>Fraudsters conceal UPI handles and bank details inside image banners and QR codes, completely evading keyword text filters.</a:t>
-            </a:r>
-          </a:p>
-          <a:p>
-            <a:pPr>
+              <a:t>•  48–72 Hour Critical Triage Lag: </a:t>
+            </a:r>
+            <a:r>
+              <a:rPr sz="1150">
+                <a:solidFill>
+                  <a:srgbClr val="334155"/>
+                </a:solidFill>
+              </a:rPr>
+              <a:t>By the time a complaint is registered, mule accounts have dispersed funds across multiple layered banking layers.</a:t>
+            </a:r>
+          </a:p>
+          <a:p>
+            <a:pPr algn="l">
               <a:spcAft>
-                <a:spcPts val="500"/>
+                <a:spcPts val="700"/>
               </a:spcAft>
             </a:pPr>
             <a:r>
-              <a:rPr b="1" sz="1050">
+              <a:rPr b="1" sz="1200">
                 <a:solidFill>
                   <a:srgbClr val="0F172A"/>
                 </a:solidFill>
               </a:rPr>
-              <a:t>• 48–72 Hour Critical Triage Lag: </a:t>
-            </a:r>
-            <a:r>
-              <a:rPr sz="1000">
-                <a:solidFill>
-                  <a:srgbClr val="64748B"/>
-                </a:solidFill>
-              </a:rPr>
-              <a:t>By the time a complaint is registered, mule accounts have dispersed funds across multiple layered banking layers.</a:t>
-            </a:r>
-          </a:p>
-          <a:p>
-            <a:pPr>
-              <a:spcAft>
-                <a:spcPts val="500"/>
-              </a:spcAft>
-            </a:pPr>
-            <a:r>
-              <a:rPr b="1" sz="1050">
-                <a:solidFill>
-                  <a:srgbClr val="0F172A"/>
-                </a:solidFill>
-              </a:rPr>
-              <a:t>• Lack of Court-Admissible Evidence: </a:t>
-            </a:r>
-            <a:r>
-              <a:rPr sz="1000">
-                <a:solidFill>
-                  <a:srgbClr val="64748B"/>
+              <a:t>•  Lack of Court-Admissible Evidence: </a:t>
+            </a:r>
+            <a:r>
+              <a:rPr sz="1150">
+                <a:solidFill>
+                  <a:srgbClr val="334155"/>
                 </a:solidFill>
               </a:rPr>
               <a:t>Raw phone screenshots lack cryptographic timestamps, origin IP metadata, and tamper-proof SHA-256 digital hashes required for FIRs.</a:t>
@@ -5283,8 +5283,8 @@
         </p:nvSpPr>
         <p:spPr>
           <a:xfrm>
-            <a:off x="731520" y="5166360"/>
-            <a:ext cx="10728655" cy="1051560"/>
+            <a:off x="731520" y="5138928"/>
+            <a:ext cx="2542032" cy="1097280"/>
           </a:xfrm>
           <a:prstGeom prst="roundRect">
             <a:avLst/>
@@ -5292,9 +5292,9 @@
           <a:solidFill>
             <a:srgbClr val="FFFFFF"/>
           </a:solidFill>
-          <a:ln>
+          <a:ln w="15240">
             <a:solidFill>
-              <a:srgbClr val="E2E8F0"/>
+              <a:srgbClr val="DAE1EB"/>
             </a:solidFill>
           </a:ln>
         </p:spPr>
@@ -5313,40 +5313,523 @@
           </a:fontRef>
         </p:style>
         <p:txBody>
-          <a:bodyPr rtlCol="0" anchor="ctr" tIns="109728" lIns="182880"/>
-          <a:lstStyle/>
-          <a:p>
-            <a:pPr algn="ctr">
-              <a:defRPr sz="950" b="1">
+          <a:bodyPr rtlCol="0" anchor="ctr"/>
+          <a:lstStyle/>
+          <a:p>
+            <a:pPr algn="ctr"/>
+          </a:p>
+        </p:txBody>
+      </p:sp>
+      <p:sp>
+        <p:nvSpPr>
+          <p:cNvPr id="12" name="Rounded Rectangle 11"/>
+          <p:cNvSpPr/>
+          <p:nvPr/>
+        </p:nvSpPr>
+        <p:spPr>
+          <a:xfrm>
+            <a:off x="731520" y="5138928"/>
+            <a:ext cx="2542032" cy="54864"/>
+          </a:xfrm>
+          <a:prstGeom prst="roundRect">
+            <a:avLst/>
+          </a:prstGeom>
+          <a:solidFill>
+            <a:srgbClr val="DC2626"/>
+          </a:solidFill>
+          <a:ln>
+            <a:noFill/>
+          </a:ln>
+        </p:spPr>
+        <p:style>
+          <a:lnRef idx="1">
+            <a:schemeClr val="accent1"/>
+          </a:lnRef>
+          <a:fillRef idx="3">
+            <a:schemeClr val="accent1"/>
+          </a:fillRef>
+          <a:effectRef idx="2">
+            <a:schemeClr val="accent1"/>
+          </a:effectRef>
+          <a:fontRef idx="minor">
+            <a:schemeClr val="lt1"/>
+          </a:fontRef>
+        </p:style>
+        <p:txBody>
+          <a:bodyPr rtlCol="0" anchor="ctr"/>
+          <a:lstStyle/>
+          <a:p>
+            <a:pPr algn="ctr"/>
+          </a:p>
+        </p:txBody>
+      </p:sp>
+      <p:sp>
+        <p:nvSpPr>
+          <p:cNvPr id="13" name="TextBox 12"/>
+          <p:cNvSpPr txBox="1"/>
+          <p:nvPr/>
+        </p:nvSpPr>
+        <p:spPr>
+          <a:xfrm>
+            <a:off x="841248" y="5248656"/>
+            <a:ext cx="2322576" cy="914400"/>
+          </a:xfrm>
+          <a:prstGeom prst="rect">
+            <a:avLst/>
+          </a:prstGeom>
+          <a:noFill/>
+        </p:spPr>
+        <p:txBody>
+          <a:bodyPr wrap="square" lIns="0" tIns="0" rIns="0" bIns="0">
+            <a:spAutoFit/>
+          </a:bodyPr>
+          <a:lstStyle/>
+          <a:p>
+            <a:pPr>
+              <a:defRPr sz="1000" b="1">
                 <a:solidFill>
                   <a:srgbClr val="DC2626"/>
                 </a:solidFill>
               </a:defRPr>
             </a:pPr>
             <a:r>
-              <a:t>THE MULE ACCOUNT PIPELINE: HOW ORCHESTRATED CRIME DRAINS CITIZEN SAVINGS</a:t>
+              <a:t>STAGE 1: ADVERTISING</a:t>
             </a:r>
           </a:p>
           <a:p>
             <a:pPr>
               <a:spcBef>
-                <a:spcPts val="400"/>
+                <a:spcPts val="300"/>
               </a:spcBef>
-              <a:defRPr sz="1100" b="1">
-                <a:solidFill>
-                  <a:srgbClr val="0F172A"/>
-                </a:solidFill>
-              </a:defRPr>
-            </a:pPr>
-            <a:r>
-              <a:t>1. Social Media Ad Recruiting Mules  ➔  2. KYC &amp; UPI Transfer via Telegram  ➔  3. Scammed Funds Injected  ➔  4. Instant ATM / Crypto Cashout (Zero Trace)</a:t>
-            </a:r>
-          </a:p>
-        </p:txBody>
-      </p:sp>
-      <p:sp>
-        <p:nvSpPr>
-          <p:cNvPr id="12" name="TextBox 11"/>
+              <a:defRPr sz="1050">
+                <a:solidFill>
+                  <a:srgbClr val="334155"/>
+                </a:solidFill>
+              </a:defRPr>
+            </a:pPr>
+            <a:r>
+              <a:t>Social Ads recruiting 'mules' on Telegram/Forums</a:t>
+            </a:r>
+          </a:p>
+        </p:txBody>
+      </p:sp>
+      <p:sp>
+        <p:nvSpPr>
+          <p:cNvPr id="14" name="Rounded Rectangle 13"/>
+          <p:cNvSpPr/>
+          <p:nvPr/>
+        </p:nvSpPr>
+        <p:spPr>
+          <a:xfrm>
+            <a:off x="3456432" y="5138928"/>
+            <a:ext cx="2542032" cy="1097280"/>
+          </a:xfrm>
+          <a:prstGeom prst="roundRect">
+            <a:avLst/>
+          </a:prstGeom>
+          <a:solidFill>
+            <a:srgbClr val="FFFFFF"/>
+          </a:solidFill>
+          <a:ln w="15240">
+            <a:solidFill>
+              <a:srgbClr val="DAE1EB"/>
+            </a:solidFill>
+          </a:ln>
+        </p:spPr>
+        <p:style>
+          <a:lnRef idx="1">
+            <a:schemeClr val="accent1"/>
+          </a:lnRef>
+          <a:fillRef idx="3">
+            <a:schemeClr val="accent1"/>
+          </a:fillRef>
+          <a:effectRef idx="2">
+            <a:schemeClr val="accent1"/>
+          </a:effectRef>
+          <a:fontRef idx="minor">
+            <a:schemeClr val="lt1"/>
+          </a:fontRef>
+        </p:style>
+        <p:txBody>
+          <a:bodyPr rtlCol="0" anchor="ctr"/>
+          <a:lstStyle/>
+          <a:p>
+            <a:pPr algn="ctr"/>
+          </a:p>
+        </p:txBody>
+      </p:sp>
+      <p:sp>
+        <p:nvSpPr>
+          <p:cNvPr id="15" name="Rounded Rectangle 14"/>
+          <p:cNvSpPr/>
+          <p:nvPr/>
+        </p:nvSpPr>
+        <p:spPr>
+          <a:xfrm>
+            <a:off x="3456432" y="5138928"/>
+            <a:ext cx="2542032" cy="54864"/>
+          </a:xfrm>
+          <a:prstGeom prst="roundRect">
+            <a:avLst/>
+          </a:prstGeom>
+          <a:solidFill>
+            <a:srgbClr val="4F46E5"/>
+          </a:solidFill>
+          <a:ln>
+            <a:noFill/>
+          </a:ln>
+        </p:spPr>
+        <p:style>
+          <a:lnRef idx="1">
+            <a:schemeClr val="accent1"/>
+          </a:lnRef>
+          <a:fillRef idx="3">
+            <a:schemeClr val="accent1"/>
+          </a:fillRef>
+          <a:effectRef idx="2">
+            <a:schemeClr val="accent1"/>
+          </a:effectRef>
+          <a:fontRef idx="minor">
+            <a:schemeClr val="lt1"/>
+          </a:fontRef>
+        </p:style>
+        <p:txBody>
+          <a:bodyPr rtlCol="0" anchor="ctr"/>
+          <a:lstStyle/>
+          <a:p>
+            <a:pPr algn="ctr"/>
+          </a:p>
+        </p:txBody>
+      </p:sp>
+      <p:sp>
+        <p:nvSpPr>
+          <p:cNvPr id="16" name="TextBox 15"/>
+          <p:cNvSpPr txBox="1"/>
+          <p:nvPr/>
+        </p:nvSpPr>
+        <p:spPr>
+          <a:xfrm>
+            <a:off x="3566160" y="5248656"/>
+            <a:ext cx="2322576" cy="914400"/>
+          </a:xfrm>
+          <a:prstGeom prst="rect">
+            <a:avLst/>
+          </a:prstGeom>
+          <a:noFill/>
+        </p:spPr>
+        <p:txBody>
+          <a:bodyPr wrap="square" lIns="0" tIns="0" rIns="0" bIns="0">
+            <a:spAutoFit/>
+          </a:bodyPr>
+          <a:lstStyle/>
+          <a:p>
+            <a:pPr>
+              <a:defRPr sz="1000" b="1">
+                <a:solidFill>
+                  <a:srgbClr val="4F46E5"/>
+                </a:solidFill>
+              </a:defRPr>
+            </a:pPr>
+            <a:r>
+              <a:t>STAGE 2: ONBOARDING</a:t>
+            </a:r>
+          </a:p>
+          <a:p>
+            <a:pPr>
+              <a:spcBef>
+                <a:spcPts val="300"/>
+              </a:spcBef>
+              <a:defRPr sz="1050">
+                <a:solidFill>
+                  <a:srgbClr val="334155"/>
+                </a:solidFill>
+              </a:defRPr>
+            </a:pPr>
+            <a:r>
+              <a:t>KYC docs, ATM cards &amp; UPI leased for 10% cut</a:t>
+            </a:r>
+          </a:p>
+        </p:txBody>
+      </p:sp>
+      <p:sp>
+        <p:nvSpPr>
+          <p:cNvPr id="17" name="Rounded Rectangle 16"/>
+          <p:cNvSpPr/>
+          <p:nvPr/>
+        </p:nvSpPr>
+        <p:spPr>
+          <a:xfrm>
+            <a:off x="6181344" y="5138928"/>
+            <a:ext cx="2542032" cy="1097280"/>
+          </a:xfrm>
+          <a:prstGeom prst="roundRect">
+            <a:avLst/>
+          </a:prstGeom>
+          <a:solidFill>
+            <a:srgbClr val="FFFFFF"/>
+          </a:solidFill>
+          <a:ln w="15240">
+            <a:solidFill>
+              <a:srgbClr val="DAE1EB"/>
+            </a:solidFill>
+          </a:ln>
+        </p:spPr>
+        <p:style>
+          <a:lnRef idx="1">
+            <a:schemeClr val="accent1"/>
+          </a:lnRef>
+          <a:fillRef idx="3">
+            <a:schemeClr val="accent1"/>
+          </a:fillRef>
+          <a:effectRef idx="2">
+            <a:schemeClr val="accent1"/>
+          </a:effectRef>
+          <a:fontRef idx="minor">
+            <a:schemeClr val="lt1"/>
+          </a:fontRef>
+        </p:style>
+        <p:txBody>
+          <a:bodyPr rtlCol="0" anchor="ctr"/>
+          <a:lstStyle/>
+          <a:p>
+            <a:pPr algn="ctr"/>
+          </a:p>
+        </p:txBody>
+      </p:sp>
+      <p:sp>
+        <p:nvSpPr>
+          <p:cNvPr id="18" name="Rounded Rectangle 17"/>
+          <p:cNvSpPr/>
+          <p:nvPr/>
+        </p:nvSpPr>
+        <p:spPr>
+          <a:xfrm>
+            <a:off x="6181344" y="5138928"/>
+            <a:ext cx="2542032" cy="54864"/>
+          </a:xfrm>
+          <a:prstGeom prst="roundRect">
+            <a:avLst/>
+          </a:prstGeom>
+          <a:solidFill>
+            <a:srgbClr val="6366F1"/>
+          </a:solidFill>
+          <a:ln>
+            <a:noFill/>
+          </a:ln>
+        </p:spPr>
+        <p:style>
+          <a:lnRef idx="1">
+            <a:schemeClr val="accent1"/>
+          </a:lnRef>
+          <a:fillRef idx="3">
+            <a:schemeClr val="accent1"/>
+          </a:fillRef>
+          <a:effectRef idx="2">
+            <a:schemeClr val="accent1"/>
+          </a:effectRef>
+          <a:fontRef idx="minor">
+            <a:schemeClr val="lt1"/>
+          </a:fontRef>
+        </p:style>
+        <p:txBody>
+          <a:bodyPr rtlCol="0" anchor="ctr"/>
+          <a:lstStyle/>
+          <a:p>
+            <a:pPr algn="ctr"/>
+          </a:p>
+        </p:txBody>
+      </p:sp>
+      <p:sp>
+        <p:nvSpPr>
+          <p:cNvPr id="19" name="TextBox 18"/>
+          <p:cNvSpPr txBox="1"/>
+          <p:nvPr/>
+        </p:nvSpPr>
+        <p:spPr>
+          <a:xfrm>
+            <a:off x="6291072" y="5248656"/>
+            <a:ext cx="2322576" cy="914400"/>
+          </a:xfrm>
+          <a:prstGeom prst="rect">
+            <a:avLst/>
+          </a:prstGeom>
+          <a:noFill/>
+        </p:spPr>
+        <p:txBody>
+          <a:bodyPr wrap="square" lIns="0" tIns="0" rIns="0" bIns="0">
+            <a:spAutoFit/>
+          </a:bodyPr>
+          <a:lstStyle/>
+          <a:p>
+            <a:pPr>
+              <a:defRPr sz="1000" b="1">
+                <a:solidFill>
+                  <a:srgbClr val="6366F1"/>
+                </a:solidFill>
+              </a:defRPr>
+            </a:pPr>
+            <a:r>
+              <a:t>STAGE 3: LAUNDERING</a:t>
+            </a:r>
+          </a:p>
+          <a:p>
+            <a:pPr>
+              <a:spcBef>
+                <a:spcPts val="300"/>
+              </a:spcBef>
+              <a:defRPr sz="1050">
+                <a:solidFill>
+                  <a:srgbClr val="334155"/>
+                </a:solidFill>
+              </a:defRPr>
+            </a:pPr>
+            <a:r>
+              <a:t>Dirty funds injected &amp; instantly split across accounts</a:t>
+            </a:r>
+          </a:p>
+        </p:txBody>
+      </p:sp>
+      <p:sp>
+        <p:nvSpPr>
+          <p:cNvPr id="20" name="Rounded Rectangle 19"/>
+          <p:cNvSpPr/>
+          <p:nvPr/>
+        </p:nvSpPr>
+        <p:spPr>
+          <a:xfrm>
+            <a:off x="8906256" y="5138928"/>
+            <a:ext cx="2542032" cy="1097280"/>
+          </a:xfrm>
+          <a:prstGeom prst="roundRect">
+            <a:avLst/>
+          </a:prstGeom>
+          <a:solidFill>
+            <a:srgbClr val="FFFFFF"/>
+          </a:solidFill>
+          <a:ln w="15240">
+            <a:solidFill>
+              <a:srgbClr val="DAE1EB"/>
+            </a:solidFill>
+          </a:ln>
+        </p:spPr>
+        <p:style>
+          <a:lnRef idx="1">
+            <a:schemeClr val="accent1"/>
+          </a:lnRef>
+          <a:fillRef idx="3">
+            <a:schemeClr val="accent1"/>
+          </a:fillRef>
+          <a:effectRef idx="2">
+            <a:schemeClr val="accent1"/>
+          </a:effectRef>
+          <a:fontRef idx="minor">
+            <a:schemeClr val="lt1"/>
+          </a:fontRef>
+        </p:style>
+        <p:txBody>
+          <a:bodyPr rtlCol="0" anchor="ctr"/>
+          <a:lstStyle/>
+          <a:p>
+            <a:pPr algn="ctr"/>
+          </a:p>
+        </p:txBody>
+      </p:sp>
+      <p:sp>
+        <p:nvSpPr>
+          <p:cNvPr id="21" name="Rounded Rectangle 20"/>
+          <p:cNvSpPr/>
+          <p:nvPr/>
+        </p:nvSpPr>
+        <p:spPr>
+          <a:xfrm>
+            <a:off x="8906256" y="5138928"/>
+            <a:ext cx="2542032" cy="54864"/>
+          </a:xfrm>
+          <a:prstGeom prst="roundRect">
+            <a:avLst/>
+          </a:prstGeom>
+          <a:solidFill>
+            <a:srgbClr val="0B132B"/>
+          </a:solidFill>
+          <a:ln>
+            <a:noFill/>
+          </a:ln>
+        </p:spPr>
+        <p:style>
+          <a:lnRef idx="1">
+            <a:schemeClr val="accent1"/>
+          </a:lnRef>
+          <a:fillRef idx="3">
+            <a:schemeClr val="accent1"/>
+          </a:fillRef>
+          <a:effectRef idx="2">
+            <a:schemeClr val="accent1"/>
+          </a:effectRef>
+          <a:fontRef idx="minor">
+            <a:schemeClr val="lt1"/>
+          </a:fontRef>
+        </p:style>
+        <p:txBody>
+          <a:bodyPr rtlCol="0" anchor="ctr"/>
+          <a:lstStyle/>
+          <a:p>
+            <a:pPr algn="ctr"/>
+          </a:p>
+        </p:txBody>
+      </p:sp>
+      <p:sp>
+        <p:nvSpPr>
+          <p:cNvPr id="22" name="TextBox 21"/>
+          <p:cNvSpPr txBox="1"/>
+          <p:nvPr/>
+        </p:nvSpPr>
+        <p:spPr>
+          <a:xfrm>
+            <a:off x="9015984" y="5248656"/>
+            <a:ext cx="2322576" cy="914400"/>
+          </a:xfrm>
+          <a:prstGeom prst="rect">
+            <a:avLst/>
+          </a:prstGeom>
+          <a:noFill/>
+        </p:spPr>
+        <p:txBody>
+          <a:bodyPr wrap="square" lIns="0" tIns="0" rIns="0" bIns="0">
+            <a:spAutoFit/>
+          </a:bodyPr>
+          <a:lstStyle/>
+          <a:p>
+            <a:pPr>
+              <a:defRPr sz="1000" b="1">
+                <a:solidFill>
+                  <a:srgbClr val="0B132B"/>
+                </a:solidFill>
+              </a:defRPr>
+            </a:pPr>
+            <a:r>
+              <a:t>STAGE 4: ATTRITION</a:t>
+            </a:r>
+          </a:p>
+          <a:p>
+            <a:pPr>
+              <a:spcBef>
+                <a:spcPts val="300"/>
+              </a:spcBef>
+              <a:defRPr sz="1050">
+                <a:solidFill>
+                  <a:srgbClr val="334155"/>
+                </a:solidFill>
+              </a:defRPr>
+            </a:pPr>
+            <a:r>
+              <a:t>Rapid ATM cash-out; victims left with frozen assets</a:t>
+            </a:r>
+          </a:p>
+        </p:txBody>
+      </p:sp>
+      <p:sp>
+        <p:nvSpPr>
+          <p:cNvPr id="23" name="TextBox 22"/>
           <p:cNvSpPr txBox="1"/>
           <p:nvPr/>
         </p:nvSpPr>
@@ -5367,9 +5850,9 @@
           <a:lstStyle/>
           <a:p>
             <a:pPr algn="l">
-              <a:defRPr sz="900">
-                <a:solidFill>
-                  <a:srgbClr val="64748B"/>
+              <a:defRPr sz="950">
+                <a:solidFill>
+                  <a:srgbClr val="334155"/>
                 </a:solidFill>
               </a:defRPr>
             </a:pPr>
@@ -5381,7 +5864,7 @@
       </p:sp>
       <p:sp>
         <p:nvSpPr>
-          <p:cNvPr id="13" name="TextBox 12"/>
+          <p:cNvPr id="24" name="TextBox 23"/>
           <p:cNvSpPr txBox="1"/>
           <p:nvPr/>
         </p:nvSpPr>
@@ -5402,7 +5885,7 @@
           <a:lstStyle/>
           <a:p>
             <a:pPr algn="r">
-              <a:defRPr sz="900" b="1">
+              <a:defRPr sz="950" b="1">
                 <a:solidFill>
                   <a:srgbClr val="4F46E5"/>
                 </a:solidFill>
@@ -5483,8 +5966,8 @@
         </p:nvSpPr>
         <p:spPr>
           <a:xfrm>
-            <a:off x="731520" y="365760"/>
-            <a:ext cx="4389120" cy="292608"/>
+            <a:off x="731520" y="347472"/>
+            <a:ext cx="4572000" cy="320040"/>
           </a:xfrm>
           <a:prstGeom prst="roundRect">
             <a:avLst/>
@@ -5492,7 +5975,7 @@
           <a:solidFill>
             <a:srgbClr val="EEF2FF"/>
           </a:solidFill>
-          <a:ln w="12700">
+          <a:ln w="15240">
             <a:solidFill>
               <a:srgbClr val="4F46E5"/>
             </a:solidFill>
@@ -5517,14 +6000,14 @@
           <a:lstStyle/>
           <a:p>
             <a:pPr algn="ctr">
-              <a:defRPr sz="900" b="1">
+              <a:defRPr sz="950" b="1">
                 <a:solidFill>
                   <a:srgbClr val="4F46E5"/>
                 </a:solidFill>
               </a:defRPr>
             </a:pPr>
             <a:r>
-              <a:t>SYSTEM SOLUTION · EXECUTIVE OVERVIEW</a:t>
+              <a:t>  SYSTEM SOLUTION · EXECUTIVE OVERVIEW  </a:t>
             </a:r>
           </a:p>
         </p:txBody>
@@ -5537,8 +6020,8 @@
         </p:nvSpPr>
         <p:spPr>
           <a:xfrm>
-            <a:off x="731520" y="731520"/>
-            <a:ext cx="10728655" cy="868680"/>
+            <a:off x="731520" y="713232"/>
+            <a:ext cx="10728655" cy="896112"/>
           </a:xfrm>
           <a:prstGeom prst="rect">
             <a:avLst/>
@@ -5552,7 +6035,7 @@
           <a:lstStyle/>
           <a:p>
             <a:pPr>
-              <a:defRPr sz="2200" b="1">
+              <a:defRPr sz="2500" b="1">
                 <a:solidFill>
                   <a:srgbClr val="0F172A"/>
                 </a:solidFill>
@@ -5567,9 +6050,9 @@
               <a:spcBef>
                 <a:spcPts val="300"/>
               </a:spcBef>
-              <a:defRPr sz="1150">
-                <a:solidFill>
-                  <a:srgbClr val="64748B"/>
+              <a:defRPr sz="1300">
+                <a:solidFill>
+                  <a:srgbClr val="334155"/>
                 </a:solidFill>
               </a:defRPr>
             </a:pPr>
@@ -5588,7 +6071,7 @@
         <p:spPr>
           <a:xfrm>
             <a:off x="731520" y="1691640"/>
-            <a:ext cx="4846320" cy="4480560"/>
+            <a:ext cx="4937760" cy="4480560"/>
           </a:xfrm>
           <a:prstGeom prst="roundRect">
             <a:avLst/>
@@ -5596,9 +6079,9 @@
           <a:solidFill>
             <a:srgbClr val="FFFFFF"/>
           </a:solidFill>
-          <a:ln w="12700">
+          <a:ln w="15240">
             <a:solidFill>
-              <a:srgbClr val="E2E8F0"/>
+              <a:srgbClr val="DAE1EB"/>
             </a:solidFill>
           </a:ln>
         </p:spPr>
@@ -5633,7 +6116,7 @@
         <p:spPr>
           <a:xfrm>
             <a:off x="731520" y="1691640"/>
-            <a:ext cx="4846320" cy="73152"/>
+            <a:ext cx="4937760" cy="73152"/>
           </a:xfrm>
           <a:prstGeom prst="roundRect">
             <a:avLst/>
@@ -5675,8 +6158,8 @@
         </p:nvSpPr>
         <p:spPr>
           <a:xfrm>
-            <a:off x="932688" y="1874520"/>
-            <a:ext cx="4443984" cy="4160520"/>
+            <a:off x="950976" y="1874520"/>
+            <a:ext cx="4498848" cy="4160520"/>
           </a:xfrm>
           <a:prstGeom prst="rect">
             <a:avLst/>
@@ -5693,7 +6176,7 @@
               <a:spcAft>
                 <a:spcPts val="200"/>
               </a:spcAft>
-              <a:defRPr sz="900" b="1">
+              <a:defRPr sz="1000" b="1">
                 <a:solidFill>
                   <a:srgbClr val="4F46E5"/>
                 </a:solidFill>
@@ -5705,132 +6188,109 @@
           </a:p>
           <a:p>
             <a:pPr>
+              <a:spcAft>
+                <a:spcPts val="800"/>
+              </a:spcAft>
+              <a:defRPr sz="1600" b="1">
+                <a:solidFill>
+                  <a:srgbClr val="0F172A"/>
+                </a:solidFill>
+              </a:defRPr>
+            </a:pPr>
+            <a:r>
+              <a:t>Key Capabilities &amp; Architecture</a:t>
+            </a:r>
+          </a:p>
+          <a:p>
+            <a:pPr algn="l">
               <a:spcAft>
                 <a:spcPts val="700"/>
               </a:spcAft>
-              <a:defRPr sz="1400" b="1">
+            </a:pPr>
+            <a:r>
+              <a:rPr b="1" sz="1200">
                 <a:solidFill>
                   <a:srgbClr val="0F172A"/>
                 </a:solidFill>
-              </a:defRPr>
-            </a:pPr>
-            <a:r>
-              <a:t>Key Capabilities &amp; Architecture</a:t>
-            </a:r>
-          </a:p>
-          <a:p>
-            <a:pPr>
+              </a:rPr>
+              <a:t>•  Autonomous Multichannel Harvesting: </a:t>
+            </a:r>
+            <a:r>
+              <a:rPr sz="1150">
+                <a:solidFill>
+                  <a:srgbClr val="334155"/>
+                </a:solidFill>
+              </a:rPr>
+              <a:t>Continuous background ingestion workers monitor Telegram underground groups, discussion forums (Charcha), and public social streams.</a:t>
+            </a:r>
+          </a:p>
+          <a:p>
+            <a:pPr algn="l">
               <a:spcAft>
-                <a:spcPts val="500"/>
+                <a:spcPts val="700"/>
               </a:spcAft>
             </a:pPr>
             <a:r>
-              <a:rPr b="1" sz="1050">
+              <a:rPr b="1" sz="1200">
                 <a:solidFill>
                   <a:srgbClr val="0F172A"/>
                 </a:solidFill>
               </a:rPr>
-              <a:t>• Autonomous Multichannel Harvesting: </a:t>
-            </a:r>
-            <a:r>
-              <a:rPr sz="1000">
-                <a:solidFill>
-                  <a:srgbClr val="64748B"/>
-                </a:solidFill>
-              </a:rPr>
-              <a:t>Continuous background ingestion workers monitor Telegram underground groups, discussion forums (Charcha), and public social streams.</a:t>
-            </a:r>
-          </a:p>
-          <a:p>
-            <a:pPr>
+              <a:t>•  Multimodal Entity Extraction: </a:t>
+            </a:r>
+            <a:r>
+              <a:rPr sz="1150">
+                <a:solidFill>
+                  <a:srgbClr val="334155"/>
+                </a:solidFill>
+              </a:rPr>
+              <a:t>Combines high-accuracy Tesseract OCR with OpenCV QR decoding to extract masked bank numbers, UPI handles, and payment links.</a:t>
+            </a:r>
+          </a:p>
+          <a:p>
+            <a:pPr algn="l">
               <a:spcAft>
-                <a:spcPts val="500"/>
+                <a:spcPts val="700"/>
               </a:spcAft>
             </a:pPr>
             <a:r>
-              <a:rPr b="1" sz="1050">
+              <a:rPr b="1" sz="1200">
                 <a:solidFill>
                   <a:srgbClr val="0F172A"/>
                 </a:solidFill>
               </a:rPr>
-              <a:t>• Multimodal Entity Extraction: </a:t>
-            </a:r>
-            <a:r>
-              <a:rPr sz="1000">
-                <a:solidFill>
-                  <a:srgbClr val="64748B"/>
-                </a:solidFill>
-              </a:rPr>
-              <a:t>Combines high-accuracy Tesseract OCR with OpenCV QR decoding to extract masked bank numbers, UPI handles, and payment links.</a:t>
-            </a:r>
-          </a:p>
-          <a:p>
-            <a:pPr>
+              <a:t>•  Dynamic Heuristic Risk Scoring: </a:t>
+            </a:r>
+            <a:r>
+              <a:rPr sz="1150">
+                <a:solidFill>
+                  <a:srgbClr val="334155"/>
+                </a:solidFill>
+              </a:rPr>
+              <a:t>NLP threat categorization instantly scores posts (0-100%) against urgency triggers, commission bait, and illicit financial keywords.</a:t>
+            </a:r>
+          </a:p>
+          <a:p>
+            <a:pPr algn="l">
               <a:spcAft>
-                <a:spcPts val="500"/>
+                <a:spcPts val="700"/>
               </a:spcAft>
             </a:pPr>
             <a:r>
-              <a:rPr b="1" sz="1050">
+              <a:rPr b="1" sz="1200">
                 <a:solidFill>
                   <a:srgbClr val="0F172A"/>
                 </a:solidFill>
               </a:rPr>
-              <a:t>• Dynamic Heuristic Risk Scoring: </a:t>
-            </a:r>
-            <a:r>
-              <a:rPr sz="1000">
-                <a:solidFill>
-                  <a:srgbClr val="64748B"/>
-                </a:solidFill>
-              </a:rPr>
-              <a:t>NLP threat categorization instantly scores posts (0-100%) against urgency triggers, commission bait, and illicit financial keywords.</a:t>
-            </a:r>
-          </a:p>
-          <a:p>
-            <a:pPr>
-              <a:spcAft>
-                <a:spcPts val="500"/>
-              </a:spcAft>
-            </a:pPr>
-            <a:r>
-              <a:rPr b="1" sz="1050">
-                <a:solidFill>
-                  <a:srgbClr val="0F172A"/>
-                </a:solidFill>
-              </a:rPr>
-              <a:t>• Mule Syndicate Entity Linking: </a:t>
-            </a:r>
-            <a:r>
-              <a:rPr sz="1000">
-                <a:solidFill>
-                  <a:srgbClr val="64748B"/>
-                </a:solidFill>
-              </a:rPr>
-              <a:t>Resolves disparate posts into unified actor profiles, linking repeated UPI handles, phone numbers, and associated telegram aliases.</a:t>
-            </a:r>
-          </a:p>
-          <a:p>
-            <a:pPr>
-              <a:spcAft>
-                <a:spcPts val="500"/>
-              </a:spcAft>
-            </a:pPr>
-            <a:r>
-              <a:rPr b="1" sz="1050">
-                <a:solidFill>
-                  <a:srgbClr val="0F172A"/>
-                </a:solidFill>
-              </a:rPr>
-              <a:t>• Cyber Cell Dispatch &amp; I4C Webhooks: </a:t>
-            </a:r>
-            <a:r>
-              <a:rPr sz="1000">
-                <a:solidFill>
-                  <a:srgbClr val="64748B"/>
-                </a:solidFill>
-              </a:rPr>
-              <a:t>1-click generation of court-admissible PDF dossiers with SHA-256 tamper-proof hashes and direct dispatch to bank nodal officers.</a:t>
+              <a:t>•  Rapid Cyber Cell Dispatch: </a:t>
+            </a:r>
+            <a:r>
+              <a:rPr sz="1150">
+                <a:solidFill>
+                  <a:srgbClr val="334155"/>
+                </a:solidFill>
+              </a:rPr>
+              <a:t>One-click generation of court-admissible PDF dossiers with SHA-256 tamper-proof hashes and direct dispatch to bank nodal officers.</a:t>
             </a:r>
           </a:p>
         </p:txBody>
@@ -5843,8 +6303,8 @@
         </p:nvSpPr>
         <p:spPr>
           <a:xfrm>
-            <a:off x="5760720" y="1691640"/>
-            <a:ext cx="5699455" cy="4480560"/>
+            <a:off x="5852160" y="1691640"/>
+            <a:ext cx="5608015" cy="4480560"/>
           </a:xfrm>
           <a:prstGeom prst="roundRect">
             <a:avLst/>
@@ -5852,9 +6312,9 @@
           <a:solidFill>
             <a:srgbClr val="FFFFFF"/>
           </a:solidFill>
-          <a:ln w="12700">
+          <a:ln w="15240">
             <a:solidFill>
-              <a:srgbClr val="E2E8F0"/>
+              <a:srgbClr val="DAE1EB"/>
             </a:solidFill>
           </a:ln>
         </p:spPr>
@@ -5896,8 +6356,8 @@
         </p:blipFill>
         <p:spPr>
           <a:xfrm>
-            <a:off x="5870448" y="1801368"/>
-            <a:ext cx="5479999" cy="3941064"/>
+            <a:off x="5961888" y="1801368"/>
+            <a:ext cx="5388559" cy="3913632"/>
           </a:xfrm>
           <a:prstGeom prst="rect">
             <a:avLst/>
@@ -5912,8 +6372,8 @@
         </p:nvSpPr>
         <p:spPr>
           <a:xfrm>
-            <a:off x="5870448" y="5815584"/>
-            <a:ext cx="5479999" cy="320040"/>
+            <a:off x="5961888" y="5788152"/>
+            <a:ext cx="5388559" cy="347472"/>
           </a:xfrm>
           <a:prstGeom prst="rect">
             <a:avLst/>
@@ -5927,7 +6387,7 @@
           <a:lstStyle/>
           <a:p>
             <a:pPr algn="ctr">
-              <a:defRPr sz="950" b="1">
+              <a:defRPr sz="1100" b="1">
                 <a:solidFill>
                   <a:srgbClr val="4F46E5"/>
                 </a:solidFill>
@@ -5962,9 +6422,9 @@
           <a:lstStyle/>
           <a:p>
             <a:pPr algn="l">
-              <a:defRPr sz="900">
-                <a:solidFill>
-                  <a:srgbClr val="64748B"/>
+              <a:defRPr sz="950">
+                <a:solidFill>
+                  <a:srgbClr val="334155"/>
                 </a:solidFill>
               </a:defRPr>
             </a:pPr>
@@ -5997,7 +6457,7 @@
           <a:lstStyle/>
           <a:p>
             <a:pPr algn="r">
-              <a:defRPr sz="900" b="1">
+              <a:defRPr sz="950" b="1">
                 <a:solidFill>
                   <a:srgbClr val="4F46E5"/>
                 </a:solidFill>
@@ -6078,8 +6538,8 @@
         </p:nvSpPr>
         <p:spPr>
           <a:xfrm>
-            <a:off x="731520" y="365760"/>
-            <a:ext cx="4389120" cy="292608"/>
+            <a:off x="731520" y="347472"/>
+            <a:ext cx="4572000" cy="320040"/>
           </a:xfrm>
           <a:prstGeom prst="roundRect">
             <a:avLst/>
@@ -6087,7 +6547,7 @@
           <a:solidFill>
             <a:srgbClr val="EEF2FF"/>
           </a:solidFill>
-          <a:ln w="12700">
+          <a:ln w="15240">
             <a:solidFill>
               <a:srgbClr val="4F46E5"/>
             </a:solidFill>
@@ -6112,14 +6572,14 @@
           <a:lstStyle/>
           <a:p>
             <a:pPr algn="ctr">
-              <a:defRPr sz="900" b="1">
+              <a:defRPr sz="950" b="1">
                 <a:solidFill>
                   <a:srgbClr val="4F46E5"/>
                 </a:solidFill>
               </a:defRPr>
             </a:pPr>
             <a:r>
-              <a:t>SYSTEM ARCHITECTURE · TECHNOLOGY STACK</a:t>
+              <a:t>  SYSTEM ARCHITECTURE · TECHNOLOGY STACK  </a:t>
             </a:r>
           </a:p>
         </p:txBody>
@@ -6132,8 +6592,8 @@
         </p:nvSpPr>
         <p:spPr>
           <a:xfrm>
-            <a:off x="731520" y="731520"/>
-            <a:ext cx="10728655" cy="868680"/>
+            <a:off x="731520" y="713232"/>
+            <a:ext cx="10728655" cy="896112"/>
           </a:xfrm>
           <a:prstGeom prst="rect">
             <a:avLst/>
@@ -6147,7 +6607,7 @@
           <a:lstStyle/>
           <a:p>
             <a:pPr>
-              <a:defRPr sz="2200" b="1">
+              <a:defRPr sz="2500" b="1">
                 <a:solidFill>
                   <a:srgbClr val="0F172A"/>
                 </a:solidFill>
@@ -6162,9 +6622,9 @@
               <a:spcBef>
                 <a:spcPts val="300"/>
               </a:spcBef>
-              <a:defRPr sz="1150">
-                <a:solidFill>
-                  <a:srgbClr val="64748B"/>
+              <a:defRPr sz="1300">
+                <a:solidFill>
+                  <a:srgbClr val="334155"/>
                 </a:solidFill>
               </a:defRPr>
             </a:pPr>
@@ -6183,7 +6643,7 @@
         <p:spPr>
           <a:xfrm>
             <a:off x="731520" y="1691640"/>
-            <a:ext cx="3383280" cy="4480560"/>
+            <a:ext cx="3429000" cy="4480560"/>
           </a:xfrm>
           <a:prstGeom prst="roundRect">
             <a:avLst/>
@@ -6191,9 +6651,9 @@
           <a:solidFill>
             <a:srgbClr val="FFFFFF"/>
           </a:solidFill>
-          <a:ln w="12700">
+          <a:ln w="15240">
             <a:solidFill>
-              <a:srgbClr val="E2E8F0"/>
+              <a:srgbClr val="DAE1EB"/>
             </a:solidFill>
           </a:ln>
         </p:spPr>
@@ -6228,7 +6688,7 @@
         <p:spPr>
           <a:xfrm>
             <a:off x="731520" y="1691640"/>
-            <a:ext cx="3383280" cy="73152"/>
+            <a:ext cx="3429000" cy="73152"/>
           </a:xfrm>
           <a:prstGeom prst="roundRect">
             <a:avLst/>
@@ -6270,8 +6730,8 @@
         </p:nvSpPr>
         <p:spPr>
           <a:xfrm>
-            <a:off x="932688" y="1874520"/>
-            <a:ext cx="2980944" cy="4160520"/>
+            <a:off x="950976" y="1874520"/>
+            <a:ext cx="2990088" cy="4160520"/>
           </a:xfrm>
           <a:prstGeom prst="rect">
             <a:avLst/>
@@ -6288,7 +6748,7 @@
               <a:spcAft>
                 <a:spcPts val="200"/>
               </a:spcAft>
-              <a:defRPr sz="900" b="1">
+              <a:defRPr sz="1000" b="1">
                 <a:solidFill>
                   <a:srgbClr val="4F46E5"/>
                 </a:solidFill>
@@ -6300,106 +6760,106 @@
           </a:p>
           <a:p>
             <a:pPr>
+              <a:spcAft>
+                <a:spcPts val="800"/>
+              </a:spcAft>
+              <a:defRPr sz="1600" b="1">
+                <a:solidFill>
+                  <a:srgbClr val="0F172A"/>
+                </a:solidFill>
+              </a:defRPr>
+            </a:pPr>
+            <a:r>
+              <a:t>Frontend Experience Layer</a:t>
+            </a:r>
+          </a:p>
+          <a:p>
+            <a:pPr algn="l">
               <a:spcAft>
                 <a:spcPts val="700"/>
               </a:spcAft>
-              <a:defRPr sz="1400" b="1">
+            </a:pPr>
+            <a:r>
+              <a:rPr b="1" sz="1200">
                 <a:solidFill>
                   <a:srgbClr val="0F172A"/>
                 </a:solidFill>
-              </a:defRPr>
-            </a:pPr>
-            <a:r>
-              <a:t>Frontend Experience Layer</a:t>
-            </a:r>
-          </a:p>
-          <a:p>
-            <a:pPr>
+              </a:rPr>
+              <a:t>•  React 18 &amp; Vite: </a:t>
+            </a:r>
+            <a:r>
+              <a:rPr sz="1150">
+                <a:solidFill>
+                  <a:srgbClr val="334155"/>
+                </a:solidFill>
+              </a:rPr>
+              <a:t>Lightning-fast reactive UI with hot module replacement and optimized production bundle.</a:t>
+            </a:r>
+          </a:p>
+          <a:p>
+            <a:pPr algn="l">
               <a:spcAft>
-                <a:spcPts val="500"/>
+                <a:spcPts val="700"/>
               </a:spcAft>
             </a:pPr>
             <a:r>
-              <a:rPr b="1" sz="1050">
+              <a:rPr b="1" sz="1200">
                 <a:solidFill>
                   <a:srgbClr val="0F172A"/>
                 </a:solidFill>
               </a:rPr>
-              <a:t>• React 18 &amp; Vite: </a:t>
-            </a:r>
-            <a:r>
-              <a:rPr sz="1000">
-                <a:solidFill>
-                  <a:srgbClr val="64748B"/>
-                </a:solidFill>
-              </a:rPr>
-              <a:t>Lightning-fast reactive UI with hot module replacement and optimized production bundle.</a:t>
-            </a:r>
-          </a:p>
-          <a:p>
-            <a:pPr>
+              <a:t>•  Tailwind CSS &amp; Lucide Icons: </a:t>
+            </a:r>
+            <a:r>
+              <a:rPr sz="1150">
+                <a:solidFill>
+                  <a:srgbClr val="334155"/>
+                </a:solidFill>
+              </a:rPr>
+              <a:t>Ergonomic, modern cyber operations center aesthetic with high-contrast data visualization.</a:t>
+            </a:r>
+          </a:p>
+          <a:p>
+            <a:pPr algn="l">
               <a:spcAft>
-                <a:spcPts val="500"/>
+                <a:spcPts val="700"/>
               </a:spcAft>
             </a:pPr>
             <a:r>
-              <a:rPr b="1" sz="1050">
+              <a:rPr b="1" sz="1200">
                 <a:solidFill>
                   <a:srgbClr val="0F172A"/>
                 </a:solidFill>
               </a:rPr>
-              <a:t>• Tailwind CSS &amp; Lucide Icons: </a:t>
-            </a:r>
-            <a:r>
-              <a:rPr sz="1000">
-                <a:solidFill>
-                  <a:srgbClr val="64748B"/>
-                </a:solidFill>
-              </a:rPr>
-              <a:t>Ergonomic, modern cyber operations center aesthetic with high-contrast data visualization.</a:t>
-            </a:r>
-          </a:p>
-          <a:p>
-            <a:pPr>
+              <a:t>•  Gapless TopoJSON Vector Map: </a:t>
+            </a:r>
+            <a:r>
+              <a:rPr sz="1150">
+                <a:solidFill>
+                  <a:srgbClr val="334155"/>
+                </a:solidFill>
+              </a:rPr>
+              <a:t>Custom-rendered SVG district map of Rajasthan with zero-gap borders and hover state binding.</a:t>
+            </a:r>
+          </a:p>
+          <a:p>
+            <a:pPr algn="l">
               <a:spcAft>
-                <a:spcPts val="500"/>
+                <a:spcPts val="700"/>
               </a:spcAft>
             </a:pPr>
             <a:r>
-              <a:rPr b="1" sz="1050">
+              <a:rPr b="1" sz="1200">
                 <a:solidFill>
                   <a:srgbClr val="0F172A"/>
                 </a:solidFill>
               </a:rPr>
-              <a:t>• Gapless TopoJSON Vector Map: </a:t>
-            </a:r>
-            <a:r>
-              <a:rPr sz="1000">
-                <a:solidFill>
-                  <a:srgbClr val="64748B"/>
-                </a:solidFill>
-              </a:rPr>
-              <a:t>Custom-rendered SVG district map of Rajasthan with zero-gap borders and hover state binding.</a:t>
-            </a:r>
-          </a:p>
-          <a:p>
-            <a:pPr>
-              <a:spcAft>
-                <a:spcPts val="500"/>
-              </a:spcAft>
-            </a:pPr>
-            <a:r>
-              <a:rPr b="1" sz="1050">
-                <a:solidFill>
-                  <a:srgbClr val="0F172A"/>
-                </a:solidFill>
-              </a:rPr>
-              <a:t>• Dynamic Polling Telemetry: </a:t>
-            </a:r>
-            <a:r>
-              <a:rPr sz="1000">
-                <a:solidFill>
-                  <a:srgbClr val="64748B"/>
+              <a:t>•  Dynamic Polling Telemetry: </a:t>
+            </a:r>
+            <a:r>
+              <a:rPr sz="1150">
+                <a:solidFill>
+                  <a:srgbClr val="334155"/>
                 </a:solidFill>
               </a:rPr>
               <a:t>Self-healing telemetry hooks polling live crawler status, alert counts, and actor networks.</a:t>
@@ -6415,8 +6875,8 @@
         </p:nvSpPr>
         <p:spPr>
           <a:xfrm>
-            <a:off x="4389120" y="1691640"/>
-            <a:ext cx="3383280" cy="4480560"/>
+            <a:off x="4370832" y="1691640"/>
+            <a:ext cx="3429000" cy="4480560"/>
           </a:xfrm>
           <a:prstGeom prst="roundRect">
             <a:avLst/>
@@ -6424,9 +6884,9 @@
           <a:solidFill>
             <a:srgbClr val="FFFFFF"/>
           </a:solidFill>
-          <a:ln w="12700">
+          <a:ln w="15240">
             <a:solidFill>
-              <a:srgbClr val="E2E8F0"/>
+              <a:srgbClr val="DAE1EB"/>
             </a:solidFill>
           </a:ln>
         </p:spPr>
@@ -6460,8 +6920,8 @@
         </p:nvSpPr>
         <p:spPr>
           <a:xfrm>
-            <a:off x="4389120" y="1691640"/>
-            <a:ext cx="3383280" cy="73152"/>
+            <a:off x="4370832" y="1691640"/>
+            <a:ext cx="3429000" cy="73152"/>
           </a:xfrm>
           <a:prstGeom prst="roundRect">
             <a:avLst/>
@@ -6504,7 +6964,7 @@
         <p:spPr>
           <a:xfrm>
             <a:off x="4590288" y="1874520"/>
-            <a:ext cx="2980944" cy="4160520"/>
+            <a:ext cx="2990088" cy="4160520"/>
           </a:xfrm>
           <a:prstGeom prst="rect">
             <a:avLst/>
@@ -6521,7 +6981,7 @@
               <a:spcAft>
                 <a:spcPts val="200"/>
               </a:spcAft>
-              <a:defRPr sz="900" b="1">
+              <a:defRPr sz="1000" b="1">
                 <a:solidFill>
                   <a:srgbClr val="0B132B"/>
                 </a:solidFill>
@@ -6533,106 +6993,106 @@
           </a:p>
           <a:p>
             <a:pPr>
+              <a:spcAft>
+                <a:spcPts val="800"/>
+              </a:spcAft>
+              <a:defRPr sz="1600" b="1">
+                <a:solidFill>
+                  <a:srgbClr val="0F172A"/>
+                </a:solidFill>
+              </a:defRPr>
+            </a:pPr>
+            <a:r>
+              <a:t>Backend &amp; Intelligence Core</a:t>
+            </a:r>
+          </a:p>
+          <a:p>
+            <a:pPr algn="l">
               <a:spcAft>
                 <a:spcPts val="700"/>
               </a:spcAft>
-              <a:defRPr sz="1400" b="1">
+            </a:pPr>
+            <a:r>
+              <a:rPr b="1" sz="1200">
                 <a:solidFill>
                   <a:srgbClr val="0F172A"/>
                 </a:solidFill>
-              </a:defRPr>
-            </a:pPr>
-            <a:r>
-              <a:t>Backend &amp; Intelligence Core</a:t>
-            </a:r>
-          </a:p>
-          <a:p>
-            <a:pPr>
+              </a:rPr>
+              <a:t>•  FastAPI &amp; Python 3.12: </a:t>
+            </a:r>
+            <a:r>
+              <a:rPr sz="1150">
+                <a:solidFill>
+                  <a:srgbClr val="334155"/>
+                </a:solidFill>
+              </a:rPr>
+              <a:t>Asynchronous ASGI framework delivering ultra-low latency REST APIs and strict Pydantic models.</a:t>
+            </a:r>
+          </a:p>
+          <a:p>
+            <a:pPr algn="l">
               <a:spcAft>
-                <a:spcPts val="500"/>
+                <a:spcPts val="700"/>
               </a:spcAft>
             </a:pPr>
             <a:r>
-              <a:rPr b="1" sz="1050">
+              <a:rPr b="1" sz="1200">
                 <a:solidFill>
                   <a:srgbClr val="0F172A"/>
                 </a:solidFill>
               </a:rPr>
-              <a:t>• FastAPI &amp; Python 3.12: </a:t>
-            </a:r>
-            <a:r>
-              <a:rPr sz="1000">
-                <a:solidFill>
-                  <a:srgbClr val="64748B"/>
-                </a:solidFill>
-              </a:rPr>
-              <a:t>Asynchronous ASGI framework delivering ultra-low latency REST APIs and strict Pydantic models.</a:t>
-            </a:r>
-          </a:p>
-          <a:p>
-            <a:pPr>
+              <a:t>•  Computer Vision &amp; OCR: </a:t>
+            </a:r>
+            <a:r>
+              <a:rPr sz="1150">
+                <a:solidFill>
+                  <a:srgbClr val="334155"/>
+                </a:solidFill>
+              </a:rPr>
+              <a:t>Tesseract OCR with adaptive image binarization; PyZBar for instant UPI QR payload decoding.</a:t>
+            </a:r>
+          </a:p>
+          <a:p>
+            <a:pPr algn="l">
               <a:spcAft>
-                <a:spcPts val="500"/>
+                <a:spcPts val="700"/>
               </a:spcAft>
             </a:pPr>
             <a:r>
-              <a:rPr b="1" sz="1050">
+              <a:rPr b="1" sz="1200">
                 <a:solidFill>
                   <a:srgbClr val="0F172A"/>
                 </a:solidFill>
               </a:rPr>
-              <a:t>• Computer Vision &amp; OCR: </a:t>
-            </a:r>
-            <a:r>
-              <a:rPr sz="1000">
-                <a:solidFill>
-                  <a:srgbClr val="64748B"/>
-                </a:solidFill>
-              </a:rPr>
-              <a:t>Tesseract OCR with adaptive image binarization; PyZBar for instant UPI QR payload decoding.</a:t>
-            </a:r>
-          </a:p>
-          <a:p>
-            <a:pPr>
+              <a:t>•  Telethon MTProto Client: </a:t>
+            </a:r>
+            <a:r>
+              <a:rPr sz="1150">
+                <a:solidFill>
+                  <a:srgbClr val="334155"/>
+                </a:solidFill>
+              </a:rPr>
+              <a:t>Native Telegram API integration capable of real-time message stream harvesting.</a:t>
+            </a:r>
+          </a:p>
+          <a:p>
+            <a:pPr algn="l">
               <a:spcAft>
-                <a:spcPts val="500"/>
+                <a:spcPts val="700"/>
               </a:spcAft>
             </a:pPr>
             <a:r>
-              <a:rPr b="1" sz="1050">
+              <a:rPr b="1" sz="1200">
                 <a:solidFill>
                   <a:srgbClr val="0F172A"/>
                 </a:solidFill>
               </a:rPr>
-              <a:t>• Telethon MTProto Client: </a:t>
-            </a:r>
-            <a:r>
-              <a:rPr sz="1000">
-                <a:solidFill>
-                  <a:srgbClr val="64748B"/>
-                </a:solidFill>
-              </a:rPr>
-              <a:t>Native Telegram API integration capable of real-time message stream harvesting.</a:t>
-            </a:r>
-          </a:p>
-          <a:p>
-            <a:pPr>
-              <a:spcAft>
-                <a:spcPts val="500"/>
-              </a:spcAft>
-            </a:pPr>
-            <a:r>
-              <a:rPr b="1" sz="1050">
-                <a:solidFill>
-                  <a:srgbClr val="0F172A"/>
-                </a:solidFill>
-              </a:rPr>
-              <a:t>• SQLite WAL Database: </a:t>
-            </a:r>
-            <a:r>
-              <a:rPr sz="1000">
-                <a:solidFill>
-                  <a:srgbClr val="64748B"/>
+              <a:t>•  SQLite WAL Database: </a:t>
+            </a:r>
+            <a:r>
+              <a:rPr sz="1150">
+                <a:solidFill>
+                  <a:srgbClr val="334155"/>
                 </a:solidFill>
               </a:rPr>
               <a:t>High-performance Write-Ahead Logging mode providing ACID transactions without heavy database overhead.</a:t>
@@ -6648,8 +7108,8 @@
         </p:nvSpPr>
         <p:spPr>
           <a:xfrm>
-            <a:off x="8046720" y="1691640"/>
-            <a:ext cx="3413455" cy="4480560"/>
+            <a:off x="8028431" y="1691640"/>
+            <a:ext cx="3429000" cy="4480560"/>
           </a:xfrm>
           <a:prstGeom prst="roundRect">
             <a:avLst/>
@@ -6657,9 +7117,9 @@
           <a:solidFill>
             <a:srgbClr val="FFFFFF"/>
           </a:solidFill>
-          <a:ln w="12700">
+          <a:ln w="15240">
             <a:solidFill>
-              <a:srgbClr val="E2E8F0"/>
+              <a:srgbClr val="DAE1EB"/>
             </a:solidFill>
           </a:ln>
         </p:spPr>
@@ -6693,8 +7153,8 @@
         </p:nvSpPr>
         <p:spPr>
           <a:xfrm>
-            <a:off x="8046720" y="1691640"/>
-            <a:ext cx="3413455" cy="73152"/>
+            <a:off x="8028431" y="1691640"/>
+            <a:ext cx="3429000" cy="73152"/>
           </a:xfrm>
           <a:prstGeom prst="roundRect">
             <a:avLst/>
@@ -6736,8 +7196,8 @@
         </p:nvSpPr>
         <p:spPr>
           <a:xfrm>
-            <a:off x="8247888" y="1874520"/>
-            <a:ext cx="3011119" cy="4160520"/>
+            <a:off x="8247887" y="1874520"/>
+            <a:ext cx="2990088" cy="4160520"/>
           </a:xfrm>
           <a:prstGeom prst="rect">
             <a:avLst/>
@@ -6754,7 +7214,7 @@
               <a:spcAft>
                 <a:spcPts val="200"/>
               </a:spcAft>
-              <a:defRPr sz="900" b="1">
+              <a:defRPr sz="1000" b="1">
                 <a:solidFill>
                   <a:srgbClr val="10B981"/>
                 </a:solidFill>
@@ -6766,106 +7226,106 @@
           </a:p>
           <a:p>
             <a:pPr>
+              <a:spcAft>
+                <a:spcPts val="800"/>
+              </a:spcAft>
+              <a:defRPr sz="1600" b="1">
+                <a:solidFill>
+                  <a:srgbClr val="0F172A"/>
+                </a:solidFill>
+              </a:defRPr>
+            </a:pPr>
+            <a:r>
+              <a:t>Forensics &amp; Police Interdiction</a:t>
+            </a:r>
+          </a:p>
+          <a:p>
+            <a:pPr algn="l">
               <a:spcAft>
                 <a:spcPts val="700"/>
               </a:spcAft>
-              <a:defRPr sz="1400" b="1">
+            </a:pPr>
+            <a:r>
+              <a:rPr b="1" sz="1200">
                 <a:solidFill>
                   <a:srgbClr val="0F172A"/>
                 </a:solidFill>
-              </a:defRPr>
-            </a:pPr>
-            <a:r>
-              <a:t>Forensics &amp; Police Interdiction</a:t>
-            </a:r>
-          </a:p>
-          <a:p>
-            <a:pPr>
+              </a:rPr>
+              <a:t>•  SHA-256 Evidence Seals: </a:t>
+            </a:r>
+            <a:r>
+              <a:rPr sz="1150">
+                <a:solidFill>
+                  <a:srgbClr val="334155"/>
+                </a:solidFill>
+              </a:rPr>
+              <a:t>Cryptographic fingerprinting of raw ad screenshots and metadata to ensure Section 65B legal validity.</a:t>
+            </a:r>
+          </a:p>
+          <a:p>
+            <a:pPr algn="l">
               <a:spcAft>
-                <a:spcPts val="500"/>
+                <a:spcPts val="700"/>
               </a:spcAft>
             </a:pPr>
             <a:r>
-              <a:rPr b="1" sz="1050">
+              <a:rPr b="1" sz="1200">
                 <a:solidFill>
                   <a:srgbClr val="0F172A"/>
                 </a:solidFill>
               </a:rPr>
-              <a:t>• SHA-256 Evidence Seals: </a:t>
-            </a:r>
-            <a:r>
-              <a:rPr sz="1000">
-                <a:solidFill>
-                  <a:srgbClr val="64748B"/>
-                </a:solidFill>
-              </a:rPr>
-              <a:t>Cryptographic fingerprinting of raw ad screenshots and metadata to ensure Section 65B legal validity.</a:t>
-            </a:r>
-          </a:p>
-          <a:p>
-            <a:pPr>
+              <a:t>•  Automated PDF Dossiers: </a:t>
+            </a:r>
+            <a:r>
+              <a:rPr sz="1150">
+                <a:solidFill>
+                  <a:srgbClr val="334155"/>
+                </a:solidFill>
+              </a:rPr>
+              <a:t>ReportLab PDF engine compiling investigator-ready case reports complete with IP and user-agent data.</a:t>
+            </a:r>
+          </a:p>
+          <a:p>
+            <a:pPr algn="l">
               <a:spcAft>
-                <a:spcPts val="500"/>
+                <a:spcPts val="700"/>
               </a:spcAft>
             </a:pPr>
             <a:r>
-              <a:rPr b="1" sz="1050">
+              <a:rPr b="1" sz="1200">
                 <a:solidFill>
                   <a:srgbClr val="0F172A"/>
                 </a:solidFill>
               </a:rPr>
-              <a:t>• Automated PDF Dossiers: </a:t>
-            </a:r>
-            <a:r>
-              <a:rPr sz="1000">
-                <a:solidFill>
-                  <a:srgbClr val="64748B"/>
-                </a:solidFill>
-              </a:rPr>
-              <a:t>ReportLab PDF engine compiling investigator-ready case reports complete with IP and user-agent data.</a:t>
-            </a:r>
-          </a:p>
-          <a:p>
-            <a:pPr>
+              <a:t>•  Reversible State Machine: </a:t>
+            </a:r>
+            <a:r>
+              <a:rPr sz="1150">
+                <a:solidFill>
+                  <a:srgbClr val="334155"/>
+                </a:solidFill>
+              </a:rPr>
+              <a:t>Enforcement safety guardrail allowing investigators to confirm fraud or revert false positives seamlessly.</a:t>
+            </a:r>
+          </a:p>
+          <a:p>
+            <a:pPr algn="l">
               <a:spcAft>
-                <a:spcPts val="500"/>
+                <a:spcPts val="700"/>
               </a:spcAft>
             </a:pPr>
             <a:r>
-              <a:rPr b="1" sz="1050">
+              <a:rPr b="1" sz="1200">
                 <a:solidFill>
                   <a:srgbClr val="0F172A"/>
                 </a:solidFill>
               </a:rPr>
-              <a:t>• Reversible State Machine: </a:t>
-            </a:r>
-            <a:r>
-              <a:rPr sz="1000">
-                <a:solidFill>
-                  <a:srgbClr val="64748B"/>
-                </a:solidFill>
-              </a:rPr>
-              <a:t>Enforcement safety guardrail allowing investigators to confirm fraud or revert false positives seamlessly.</a:t>
-            </a:r>
-          </a:p>
-          <a:p>
-            <a:pPr>
-              <a:spcAft>
-                <a:spcPts val="500"/>
-              </a:spcAft>
-            </a:pPr>
-            <a:r>
-              <a:rPr b="1" sz="1050">
-                <a:solidFill>
-                  <a:srgbClr val="0F172A"/>
-                </a:solidFill>
-              </a:rPr>
-              <a:t>• Unified Launcher (`./run.sh`): </a:t>
-            </a:r>
-            <a:r>
-              <a:rPr sz="1000">
-                <a:solidFill>
-                  <a:srgbClr val="64748B"/>
+              <a:t>•  Unified Launcher (`./run.sh`): </a:t>
+            </a:r>
+            <a:r>
+              <a:rPr sz="1150">
+                <a:solidFill>
+                  <a:srgbClr val="334155"/>
                 </a:solidFill>
               </a:rPr>
               <a:t>One-click shell deployment bootstrapping backend, frontend, and simulated mock services concurrently.</a:t>
@@ -6896,9 +7356,9 @@
           <a:lstStyle/>
           <a:p>
             <a:pPr algn="l">
-              <a:defRPr sz="900">
-                <a:solidFill>
-                  <a:srgbClr val="64748B"/>
+              <a:defRPr sz="950">
+                <a:solidFill>
+                  <a:srgbClr val="334155"/>
                 </a:solidFill>
               </a:defRPr>
             </a:pPr>
@@ -6931,7 +7391,7 @@
           <a:lstStyle/>
           <a:p>
             <a:pPr algn="r">
-              <a:defRPr sz="900" b="1">
+              <a:defRPr sz="950" b="1">
                 <a:solidFill>
                   <a:srgbClr val="4F46E5"/>
                 </a:solidFill>
@@ -7012,8 +7472,8 @@
         </p:nvSpPr>
         <p:spPr>
           <a:xfrm>
-            <a:off x="731520" y="365760"/>
-            <a:ext cx="4389120" cy="292608"/>
+            <a:off x="731520" y="347472"/>
+            <a:ext cx="4572000" cy="320040"/>
           </a:xfrm>
           <a:prstGeom prst="roundRect">
             <a:avLst/>
@@ -7021,7 +7481,7 @@
           <a:solidFill>
             <a:srgbClr val="EEF2FF"/>
           </a:solidFill>
-          <a:ln w="12700">
+          <a:ln w="15240">
             <a:solidFill>
               <a:srgbClr val="4F46E5"/>
             </a:solidFill>
@@ -7046,14 +7506,14 @@
           <a:lstStyle/>
           <a:p>
             <a:pPr algn="ctr">
-              <a:defRPr sz="900" b="1">
+              <a:defRPr sz="950" b="1">
                 <a:solidFill>
                   <a:srgbClr val="4F46E5"/>
                 </a:solidFill>
               </a:defRPr>
             </a:pPr>
             <a:r>
-              <a:t>CORE CAPABILITY 1 · INTELLIGENCE HARVESTING</a:t>
+              <a:t>  CORE CAPABILITY 1 · INTELLIGENCE HARVESTING  </a:t>
             </a:r>
           </a:p>
         </p:txBody>
@@ -7066,8 +7526,8 @@
         </p:nvSpPr>
         <p:spPr>
           <a:xfrm>
-            <a:off x="731520" y="731520"/>
-            <a:ext cx="10728655" cy="868680"/>
+            <a:off x="731520" y="713232"/>
+            <a:ext cx="10728655" cy="896112"/>
           </a:xfrm>
           <a:prstGeom prst="rect">
             <a:avLst/>
@@ -7081,7 +7541,7 @@
           <a:lstStyle/>
           <a:p>
             <a:pPr>
-              <a:defRPr sz="2200" b="1">
+              <a:defRPr sz="2500" b="1">
                 <a:solidFill>
                   <a:srgbClr val="0F172A"/>
                 </a:solidFill>
@@ -7096,9 +7556,9 @@
               <a:spcBef>
                 <a:spcPts val="300"/>
               </a:spcBef>
-              <a:defRPr sz="1150">
-                <a:solidFill>
-                  <a:srgbClr val="64748B"/>
+              <a:defRPr sz="1300">
+                <a:solidFill>
+                  <a:srgbClr val="334155"/>
                 </a:solidFill>
               </a:defRPr>
             </a:pPr>
@@ -7117,7 +7577,7 @@
         <p:spPr>
           <a:xfrm>
             <a:off x="731520" y="1691640"/>
-            <a:ext cx="4846320" cy="4480560"/>
+            <a:ext cx="4937760" cy="4480560"/>
           </a:xfrm>
           <a:prstGeom prst="roundRect">
             <a:avLst/>
@@ -7125,9 +7585,9 @@
           <a:solidFill>
             <a:srgbClr val="FFFFFF"/>
           </a:solidFill>
-          <a:ln w="12700">
+          <a:ln w="15240">
             <a:solidFill>
-              <a:srgbClr val="E2E8F0"/>
+              <a:srgbClr val="DAE1EB"/>
             </a:solidFill>
           </a:ln>
         </p:spPr>
@@ -7162,7 +7622,7 @@
         <p:spPr>
           <a:xfrm>
             <a:off x="731520" y="1691640"/>
-            <a:ext cx="4846320" cy="73152"/>
+            <a:ext cx="4937760" cy="73152"/>
           </a:xfrm>
           <a:prstGeom prst="roundRect">
             <a:avLst/>
@@ -7204,8 +7664,8 @@
         </p:nvSpPr>
         <p:spPr>
           <a:xfrm>
-            <a:off x="932688" y="1874520"/>
-            <a:ext cx="4443984" cy="4160520"/>
+            <a:off x="950976" y="1874520"/>
+            <a:ext cx="4498848" cy="4160520"/>
           </a:xfrm>
           <a:prstGeom prst="rect">
             <a:avLst/>
@@ -7222,7 +7682,7 @@
               <a:spcAft>
                 <a:spcPts val="200"/>
               </a:spcAft>
-              <a:defRPr sz="900" b="1">
+              <a:defRPr sz="1000" b="1">
                 <a:solidFill>
                   <a:srgbClr val="4F46E5"/>
                 </a:solidFill>
@@ -7234,132 +7694,109 @@
           </a:p>
           <a:p>
             <a:pPr>
+              <a:spcAft>
+                <a:spcPts val="800"/>
+              </a:spcAft>
+              <a:defRPr sz="1600" b="1">
+                <a:solidFill>
+                  <a:srgbClr val="0F172A"/>
+                </a:solidFill>
+              </a:defRPr>
+            </a:pPr>
+            <a:r>
+              <a:t>Automated Ingestion Infrastructure</a:t>
+            </a:r>
+          </a:p>
+          <a:p>
+            <a:pPr algn="l">
               <a:spcAft>
                 <a:spcPts val="700"/>
               </a:spcAft>
-              <a:defRPr sz="1400" b="1">
+            </a:pPr>
+            <a:r>
+              <a:rPr b="1" sz="1200">
                 <a:solidFill>
                   <a:srgbClr val="0F172A"/>
                 </a:solidFill>
-              </a:defRPr>
-            </a:pPr>
-            <a:r>
-              <a:t>Automated Ingestion Infrastructure</a:t>
-            </a:r>
-          </a:p>
-          <a:p>
-            <a:pPr>
+              </a:rPr>
+              <a:t>•  Telethon MTProto Ingestion: </a:t>
+            </a:r>
+            <a:r>
+              <a:rPr sz="1150">
+                <a:solidFill>
+                  <a:srgbClr val="334155"/>
+                </a:solidFill>
+              </a:rPr>
+              <a:t>Subscribes directly to suspect Telegram channels, capturing incoming messages, forwarded posts, and embedded image assets in real time.</a:t>
+            </a:r>
+          </a:p>
+          <a:p>
+            <a:pPr algn="l">
               <a:spcAft>
-                <a:spcPts val="500"/>
+                <a:spcPts val="700"/>
               </a:spcAft>
             </a:pPr>
             <a:r>
-              <a:rPr b="1" sz="1050">
+              <a:rPr b="1" sz="1200">
                 <a:solidFill>
                   <a:srgbClr val="0F172A"/>
                 </a:solidFill>
               </a:rPr>
-              <a:t>• Telethon MTProto Telegram Ingestion: </a:t>
-            </a:r>
-            <a:r>
-              <a:rPr sz="1000">
-                <a:solidFill>
-                  <a:srgbClr val="64748B"/>
-                </a:solidFill>
-              </a:rPr>
-              <a:t>Subscribes directly to suspect Telegram channels, capturing incoming messages, forwarded posts, and embedded image assets in real time.</a:t>
-            </a:r>
-          </a:p>
-          <a:p>
-            <a:pPr>
+              <a:t>•  Charcha Forum Scraper: </a:t>
+            </a:r>
+            <a:r>
+              <a:rPr sz="1150">
+                <a:solidFill>
+                  <a:srgbClr val="334155"/>
+                </a:solidFill>
+              </a:rPr>
+              <a:t>Dedicated resilient crawler with dynamic pagination, thread tracking, and deduplication for local underground discussion boards.</a:t>
+            </a:r>
+          </a:p>
+          <a:p>
+            <a:pPr algn="l">
               <a:spcAft>
-                <a:spcPts val="500"/>
+                <a:spcPts val="700"/>
               </a:spcAft>
             </a:pPr>
             <a:r>
-              <a:rPr b="1" sz="1050">
+              <a:rPr b="1" sz="1200">
                 <a:solidFill>
                   <a:srgbClr val="0F172A"/>
                 </a:solidFill>
               </a:rPr>
-              <a:t>• Charcha Discussion Forum Scraper: </a:t>
-            </a:r>
-            <a:r>
-              <a:rPr sz="1000">
-                <a:solidFill>
-                  <a:srgbClr val="64748B"/>
-                </a:solidFill>
-              </a:rPr>
-              <a:t>Dedicated resilient crawler with dynamic pagination, thread tracking, and deduplication for local underground discussion boards.</a:t>
-            </a:r>
-          </a:p>
-          <a:p>
-            <a:pPr>
+              <a:t>•  SimHash &amp; LSH Deduplication: </a:t>
+            </a:r>
+            <a:r>
+              <a:rPr sz="1150">
+                <a:solidFill>
+                  <a:srgbClr val="334155"/>
+                </a:solidFill>
+              </a:rPr>
+              <a:t>Locality-Sensitive Hashing identifies duplicate syndicated ads reposted across dozens of channels, consolidating threat records.</a:t>
+            </a:r>
+          </a:p>
+          <a:p>
+            <a:pPr algn="l">
               <a:spcAft>
-                <a:spcPts val="500"/>
+                <a:spcPts val="700"/>
               </a:spcAft>
             </a:pPr>
             <a:r>
-              <a:rPr b="1" sz="1050">
+              <a:rPr b="1" sz="1200">
                 <a:solidFill>
                   <a:srgbClr val="0F172A"/>
                 </a:solidFill>
               </a:rPr>
-              <a:t>• SimHash &amp; LSH Deduplication: </a:t>
-            </a:r>
-            <a:r>
-              <a:rPr sz="1000">
-                <a:solidFill>
-                  <a:srgbClr val="64748B"/>
-                </a:solidFill>
-              </a:rPr>
-              <a:t>Locality-Sensitive Hashing identifies duplicate syndicated ads reposted across dozens of channels, consolidating threat records.</a:t>
-            </a:r>
-          </a:p>
-          <a:p>
-            <a:pPr>
-              <a:spcAft>
-                <a:spcPts val="500"/>
-              </a:spcAft>
-            </a:pPr>
-            <a:r>
-              <a:rPr b="1" sz="1050">
-                <a:solidFill>
-                  <a:srgbClr val="0F172A"/>
-                </a:solidFill>
-              </a:rPr>
-              <a:t>• Live Crawler Health Telemetry: </a:t>
-            </a:r>
-            <a:r>
-              <a:rPr sz="1000">
-                <a:solidFill>
-                  <a:srgbClr val="64748B"/>
+              <a:t>•  Live Crawler Health Telemetry: </a:t>
+            </a:r>
+            <a:r>
+              <a:rPr sz="1150">
+                <a:solidFill>
+                  <a:srgbClr val="334155"/>
                 </a:solidFill>
               </a:rPr>
               <a:t>Real-time heartbeat monitoring tracks active endpoints, fetch latencies, and total harvested records with automatic retry policies.</a:t>
-            </a:r>
-          </a:p>
-          <a:p>
-            <a:pPr>
-              <a:spcAft>
-                <a:spcPts val="500"/>
-              </a:spcAft>
-            </a:pPr>
-            <a:r>
-              <a:rPr b="1" sz="1050">
-                <a:solidFill>
-                  <a:srgbClr val="0F172A"/>
-                </a:solidFill>
-              </a:rPr>
-              <a:t>• Extensible Ingestion API: </a:t>
-            </a:r>
-            <a:r>
-              <a:rPr sz="1000">
-                <a:solidFill>
-                  <a:srgbClr val="64748B"/>
-                </a:solidFill>
-              </a:rPr>
-              <a:t>Standardized webhook receiver accepts external threat feeds from partner cybersecurity teams and public reporting portals.</a:t>
             </a:r>
           </a:p>
         </p:txBody>
@@ -7372,8 +7809,8 @@
         </p:nvSpPr>
         <p:spPr>
           <a:xfrm>
-            <a:off x="5760720" y="1691640"/>
-            <a:ext cx="5699455" cy="4480560"/>
+            <a:off x="5852160" y="1691640"/>
+            <a:ext cx="5608015" cy="4480560"/>
           </a:xfrm>
           <a:prstGeom prst="roundRect">
             <a:avLst/>
@@ -7381,9 +7818,9 @@
           <a:solidFill>
             <a:srgbClr val="FFFFFF"/>
           </a:solidFill>
-          <a:ln w="12700">
+          <a:ln w="15240">
             <a:solidFill>
-              <a:srgbClr val="E2E8F0"/>
+              <a:srgbClr val="DAE1EB"/>
             </a:solidFill>
           </a:ln>
         </p:spPr>
@@ -7425,8 +7862,8 @@
         </p:blipFill>
         <p:spPr>
           <a:xfrm>
-            <a:off x="5870448" y="1801368"/>
-            <a:ext cx="5479999" cy="3941064"/>
+            <a:off x="5961888" y="1801368"/>
+            <a:ext cx="5388559" cy="3913632"/>
           </a:xfrm>
           <a:prstGeom prst="rect">
             <a:avLst/>
@@ -7441,8 +7878,8 @@
         </p:nvSpPr>
         <p:spPr>
           <a:xfrm>
-            <a:off x="5870448" y="5815584"/>
-            <a:ext cx="5479999" cy="320040"/>
+            <a:off x="5961888" y="5788152"/>
+            <a:ext cx="5388559" cy="347472"/>
           </a:xfrm>
           <a:prstGeom prst="rect">
             <a:avLst/>
@@ -7456,7 +7893,7 @@
           <a:lstStyle/>
           <a:p>
             <a:pPr algn="ctr">
-              <a:defRPr sz="950" b="1">
+              <a:defRPr sz="1100" b="1">
                 <a:solidFill>
                   <a:srgbClr val="4F46E5"/>
                 </a:solidFill>
@@ -7491,9 +7928,9 @@
           <a:lstStyle/>
           <a:p>
             <a:pPr algn="l">
-              <a:defRPr sz="900">
-                <a:solidFill>
-                  <a:srgbClr val="64748B"/>
+              <a:defRPr sz="950">
+                <a:solidFill>
+                  <a:srgbClr val="334155"/>
                 </a:solidFill>
               </a:defRPr>
             </a:pPr>
@@ -7526,7 +7963,7 @@
           <a:lstStyle/>
           <a:p>
             <a:pPr algn="r">
-              <a:defRPr sz="900" b="1">
+              <a:defRPr sz="950" b="1">
                 <a:solidFill>
                   <a:srgbClr val="4F46E5"/>
                 </a:solidFill>
@@ -7607,8 +8044,8 @@
         </p:nvSpPr>
         <p:spPr>
           <a:xfrm>
-            <a:off x="731520" y="365760"/>
-            <a:ext cx="4389120" cy="292608"/>
+            <a:off x="731520" y="347472"/>
+            <a:ext cx="4572000" cy="320040"/>
           </a:xfrm>
           <a:prstGeom prst="roundRect">
             <a:avLst/>
@@ -7616,7 +8053,7 @@
           <a:solidFill>
             <a:srgbClr val="EEF2FF"/>
           </a:solidFill>
-          <a:ln w="12700">
+          <a:ln w="15240">
             <a:solidFill>
               <a:srgbClr val="4F46E5"/>
             </a:solidFill>
@@ -7641,14 +8078,14 @@
           <a:lstStyle/>
           <a:p>
             <a:pPr algn="ctr">
-              <a:defRPr sz="900" b="1">
+              <a:defRPr sz="950" b="1">
                 <a:solidFill>
                   <a:srgbClr val="4F46E5"/>
                 </a:solidFill>
               </a:defRPr>
             </a:pPr>
             <a:r>
-              <a:t>CORE CAPABILITY 2 · MULTIMODAL FORENSICS</a:t>
+              <a:t>  CORE CAPABILITY 2 · MULTIMODAL FORENSICS  </a:t>
             </a:r>
           </a:p>
         </p:txBody>
@@ -7661,8 +8098,8 @@
         </p:nvSpPr>
         <p:spPr>
           <a:xfrm>
-            <a:off x="731520" y="731520"/>
-            <a:ext cx="10728655" cy="868680"/>
+            <a:off x="731520" y="713232"/>
+            <a:ext cx="10728655" cy="896112"/>
           </a:xfrm>
           <a:prstGeom prst="rect">
             <a:avLst/>
@@ -7676,7 +8113,7 @@
           <a:lstStyle/>
           <a:p>
             <a:pPr>
-              <a:defRPr sz="2200" b="1">
+              <a:defRPr sz="2500" b="1">
                 <a:solidFill>
                   <a:srgbClr val="0F172A"/>
                 </a:solidFill>
@@ -7691,9 +8128,9 @@
               <a:spcBef>
                 <a:spcPts val="300"/>
               </a:spcBef>
-              <a:defRPr sz="1150">
-                <a:solidFill>
-                  <a:srgbClr val="64748B"/>
+              <a:defRPr sz="1300">
+                <a:solidFill>
+                  <a:srgbClr val="334155"/>
                 </a:solidFill>
               </a:defRPr>
             </a:pPr>
@@ -7712,7 +8149,7 @@
         <p:spPr>
           <a:xfrm>
             <a:off x="731520" y="1691640"/>
-            <a:ext cx="4846320" cy="4480560"/>
+            <a:ext cx="4937760" cy="4480560"/>
           </a:xfrm>
           <a:prstGeom prst="roundRect">
             <a:avLst/>
@@ -7720,9 +8157,9 @@
           <a:solidFill>
             <a:srgbClr val="FFFFFF"/>
           </a:solidFill>
-          <a:ln w="12700">
+          <a:ln w="15240">
             <a:solidFill>
-              <a:srgbClr val="E2E8F0"/>
+              <a:srgbClr val="DAE1EB"/>
             </a:solidFill>
           </a:ln>
         </p:spPr>
@@ -7757,7 +8194,7 @@
         <p:spPr>
           <a:xfrm>
             <a:off x="731520" y="1691640"/>
-            <a:ext cx="4846320" cy="73152"/>
+            <a:ext cx="4937760" cy="73152"/>
           </a:xfrm>
           <a:prstGeom prst="roundRect">
             <a:avLst/>
@@ -7799,8 +8236,8 @@
         </p:nvSpPr>
         <p:spPr>
           <a:xfrm>
-            <a:off x="932688" y="1874520"/>
-            <a:ext cx="4443984" cy="4160520"/>
+            <a:off x="950976" y="1874520"/>
+            <a:ext cx="4498848" cy="4160520"/>
           </a:xfrm>
           <a:prstGeom prst="rect">
             <a:avLst/>
@@ -7817,7 +8254,7 @@
               <a:spcAft>
                 <a:spcPts val="200"/>
               </a:spcAft>
-              <a:defRPr sz="900" b="1">
+              <a:defRPr sz="1000" b="1">
                 <a:solidFill>
                   <a:srgbClr val="4F46E5"/>
                 </a:solidFill>
@@ -7829,129 +8266,106 @@
           </a:p>
           <a:p>
             <a:pPr>
+              <a:spcAft>
+                <a:spcPts val="800"/>
+              </a:spcAft>
+              <a:defRPr sz="1600" b="1">
+                <a:solidFill>
+                  <a:srgbClr val="0F172A"/>
+                </a:solidFill>
+              </a:defRPr>
+            </a:pPr>
+            <a:r>
+              <a:t>Deep Visual Extraction Engine</a:t>
+            </a:r>
+          </a:p>
+          <a:p>
+            <a:pPr algn="l">
               <a:spcAft>
                 <a:spcPts val="700"/>
               </a:spcAft>
-              <a:defRPr sz="1400" b="1">
+            </a:pPr>
+            <a:r>
+              <a:rPr b="1" sz="1200">
                 <a:solidFill>
                   <a:srgbClr val="0F172A"/>
                 </a:solidFill>
-              </a:defRPr>
-            </a:pPr>
-            <a:r>
-              <a:t>Deep Visual Extraction Engine</a:t>
-            </a:r>
-          </a:p>
-          <a:p>
-            <a:pPr>
+              </a:rPr>
+              <a:t>•  Adaptive Image Pre-Processing: </a:t>
+            </a:r>
+            <a:r>
+              <a:rPr sz="1150">
+                <a:solidFill>
+                  <a:srgbClr val="334155"/>
+                </a:solidFill>
+              </a:rPr>
+              <a:t>Applies contrast stretching, adaptive thresholding, and noise reduction to overcome obfuscated fonts and low-resolution screenshots.</a:t>
+            </a:r>
+          </a:p>
+          <a:p>
+            <a:pPr algn="l">
               <a:spcAft>
-                <a:spcPts val="500"/>
+                <a:spcPts val="700"/>
               </a:spcAft>
             </a:pPr>
             <a:r>
-              <a:rPr b="1" sz="1050">
+              <a:rPr b="1" sz="1200">
                 <a:solidFill>
                   <a:srgbClr val="0F172A"/>
                 </a:solidFill>
               </a:rPr>
-              <a:t>• Adaptive Image Pre-Processing: </a:t>
-            </a:r>
-            <a:r>
-              <a:rPr sz="1000">
-                <a:solidFill>
-                  <a:srgbClr val="64748B"/>
-                </a:solidFill>
-              </a:rPr>
-              <a:t>Applies contrast stretching, adaptive thresholding, and noise reduction to overcome obfuscated fonts and low-resolution screenshots.</a:t>
-            </a:r>
-          </a:p>
-          <a:p>
-            <a:pPr>
+              <a:t>•  Tesseract OCR Entity Parsing: </a:t>
+            </a:r>
+            <a:r>
+              <a:rPr sz="1150">
+                <a:solidFill>
+                  <a:srgbClr val="334155"/>
+                </a:solidFill>
+              </a:rPr>
+              <a:t>Extracts masked bank names, IFSC codes, phone numbers, and commission percentages from graphic ad banners.</a:t>
+            </a:r>
+          </a:p>
+          <a:p>
+            <a:pPr algn="l">
               <a:spcAft>
-                <a:spcPts val="500"/>
+                <a:spcPts val="700"/>
               </a:spcAft>
             </a:pPr>
             <a:r>
-              <a:rPr b="1" sz="1050">
+              <a:rPr b="1" sz="1200">
                 <a:solidFill>
                   <a:srgbClr val="0F172A"/>
                 </a:solidFill>
               </a:rPr>
-              <a:t>• Tesseract OCR Entity Parsing: </a:t>
-            </a:r>
-            <a:r>
-              <a:rPr sz="1000">
-                <a:solidFill>
-                  <a:srgbClr val="64748B"/>
-                </a:solidFill>
-              </a:rPr>
-              <a:t>Extracts masked bank names, IFSC codes, phone numbers, and commission percentages from graphic ad banners.</a:t>
-            </a:r>
-          </a:p>
-          <a:p>
-            <a:pPr>
+              <a:t>•  Instant UPI &amp; Crypto QR Decoding: </a:t>
+            </a:r>
+            <a:r>
+              <a:rPr sz="1150">
+                <a:solidFill>
+                  <a:srgbClr val="334155"/>
+                </a:solidFill>
+              </a:rPr>
+              <a:t>OpenCV and PyZBar decoder extracts raw `upi://pay?pa=...` merchant strings and crypto wallet addresses directly from payment graphics.</a:t>
+            </a:r>
+          </a:p>
+          <a:p>
+            <a:pPr algn="l">
               <a:spcAft>
-                <a:spcPts val="500"/>
+                <a:spcPts val="700"/>
               </a:spcAft>
             </a:pPr>
             <a:r>
-              <a:rPr b="1" sz="1050">
+              <a:rPr b="1" sz="1200">
                 <a:solidFill>
                   <a:srgbClr val="0F172A"/>
                 </a:solidFill>
               </a:rPr>
-              <a:t>• Instant UPI &amp; Crypto QR Decoding: </a:t>
-            </a:r>
-            <a:r>
-              <a:rPr sz="1000">
-                <a:solidFill>
-                  <a:srgbClr val="64748B"/>
-                </a:solidFill>
-              </a:rPr>
-              <a:t>OpenCV and PyZBar decoder extracts raw `upi://pay?pa=...` merchant strings and crypto wallet addresses directly from payment graphics.</a:t>
-            </a:r>
-          </a:p>
-          <a:p>
-            <a:pPr>
-              <a:spcAft>
-                <a:spcPts val="500"/>
-              </a:spcAft>
-            </a:pPr>
-            <a:r>
-              <a:rPr b="1" sz="1050">
-                <a:solidFill>
-                  <a:srgbClr val="0F172A"/>
-                </a:solidFill>
-              </a:rPr>
-              <a:t>• NLP Risk Scoring Heuristics: </a:t>
-            </a:r>
-            <a:r>
-              <a:rPr sz="1000">
-                <a:solidFill>
-                  <a:srgbClr val="64748B"/>
-                </a:solidFill>
-              </a:rPr>
-              <a:t>Evaluates linguistic urgency indicators ('Immediate Need', 'Rent Bank Account', '10% Daily Commission') into weighted threat scores.</a:t>
-            </a:r>
-          </a:p>
-          <a:p>
-            <a:pPr>
-              <a:spcAft>
-                <a:spcPts val="500"/>
-              </a:spcAft>
-            </a:pPr>
-            <a:r>
-              <a:rPr b="1" sz="1050">
-                <a:solidFill>
-                  <a:srgbClr val="0F172A"/>
-                </a:solidFill>
-              </a:rPr>
-              <a:t>• Interactive 'Check a Post' Hub: </a:t>
-            </a:r>
-            <a:r>
-              <a:rPr sz="1000">
-                <a:solidFill>
-                  <a:srgbClr val="64748B"/>
+              <a:t>•  Interactive 'Check a Post' Hub: </a:t>
+            </a:r>
+            <a:r>
+              <a:rPr sz="1150">
+                <a:solidFill>
+                  <a:srgbClr val="334155"/>
                 </a:solidFill>
               </a:rPr>
               <a:t>Allows investigators to test suspicious URLs, paste raw text, or upload image screenshots for instantaneous risk analysis.</a:t>
@@ -7967,8 +8381,8 @@
         </p:nvSpPr>
         <p:spPr>
           <a:xfrm>
-            <a:off x="5760720" y="1691640"/>
-            <a:ext cx="5699455" cy="4480560"/>
+            <a:off x="5852160" y="1691640"/>
+            <a:ext cx="5608015" cy="4480560"/>
           </a:xfrm>
           <a:prstGeom prst="roundRect">
             <a:avLst/>
@@ -7976,9 +8390,9 @@
           <a:solidFill>
             <a:srgbClr val="FFFFFF"/>
           </a:solidFill>
-          <a:ln w="12700">
+          <a:ln w="15240">
             <a:solidFill>
-              <a:srgbClr val="E2E8F0"/>
+              <a:srgbClr val="DAE1EB"/>
             </a:solidFill>
           </a:ln>
         </p:spPr>
@@ -8020,8 +8434,8 @@
         </p:blipFill>
         <p:spPr>
           <a:xfrm>
-            <a:off x="5870448" y="1801368"/>
-            <a:ext cx="5479999" cy="3941064"/>
+            <a:off x="5961888" y="1801368"/>
+            <a:ext cx="5388559" cy="3913632"/>
           </a:xfrm>
           <a:prstGeom prst="rect">
             <a:avLst/>
@@ -8036,8 +8450,8 @@
         </p:nvSpPr>
         <p:spPr>
           <a:xfrm>
-            <a:off x="5870448" y="5815584"/>
-            <a:ext cx="5479999" cy="320040"/>
+            <a:off x="5961888" y="5788152"/>
+            <a:ext cx="5388559" cy="347472"/>
           </a:xfrm>
           <a:prstGeom prst="rect">
             <a:avLst/>
@@ -8051,7 +8465,7 @@
           <a:lstStyle/>
           <a:p>
             <a:pPr algn="ctr">
-              <a:defRPr sz="950" b="1">
+              <a:defRPr sz="1100" b="1">
                 <a:solidFill>
                   <a:srgbClr val="4F46E5"/>
                 </a:solidFill>
@@ -8086,9 +8500,9 @@
           <a:lstStyle/>
           <a:p>
             <a:pPr algn="l">
-              <a:defRPr sz="900">
-                <a:solidFill>
-                  <a:srgbClr val="64748B"/>
+              <a:defRPr sz="950">
+                <a:solidFill>
+                  <a:srgbClr val="334155"/>
                 </a:solidFill>
               </a:defRPr>
             </a:pPr>
@@ -8121,7 +8535,7 @@
           <a:lstStyle/>
           <a:p>
             <a:pPr algn="r">
-              <a:defRPr sz="900" b="1">
+              <a:defRPr sz="950" b="1">
                 <a:solidFill>
                   <a:srgbClr val="4F46E5"/>
                 </a:solidFill>
@@ -8202,8 +8616,8 @@
         </p:nvSpPr>
         <p:spPr>
           <a:xfrm>
-            <a:off x="731520" y="365760"/>
-            <a:ext cx="4389120" cy="292608"/>
+            <a:off x="731520" y="347472"/>
+            <a:ext cx="4572000" cy="320040"/>
           </a:xfrm>
           <a:prstGeom prst="roundRect">
             <a:avLst/>
@@ -8211,7 +8625,7 @@
           <a:solidFill>
             <a:srgbClr val="EEF2FF"/>
           </a:solidFill>
-          <a:ln w="12700">
+          <a:ln w="15240">
             <a:solidFill>
               <a:srgbClr val="4F46E5"/>
             </a:solidFill>
@@ -8236,14 +8650,14 @@
           <a:lstStyle/>
           <a:p>
             <a:pPr algn="ctr">
-              <a:defRPr sz="900" b="1">
+              <a:defRPr sz="950" b="1">
                 <a:solidFill>
                   <a:srgbClr val="4F46E5"/>
                 </a:solidFill>
               </a:defRPr>
             </a:pPr>
             <a:r>
-              <a:t>CORE CAPABILITY 3 · GEOSPATIAL INTELLIGENCE</a:t>
+              <a:t>  CORE CAPABILITY 3 · GEOSPATIAL INTELLIGENCE  </a:t>
             </a:r>
           </a:p>
         </p:txBody>
@@ -8256,8 +8670,8 @@
         </p:nvSpPr>
         <p:spPr>
           <a:xfrm>
-            <a:off x="731520" y="731520"/>
-            <a:ext cx="10728655" cy="868680"/>
+            <a:off x="731520" y="713232"/>
+            <a:ext cx="10728655" cy="896112"/>
           </a:xfrm>
           <a:prstGeom prst="rect">
             <a:avLst/>
@@ -8271,7 +8685,7 @@
           <a:lstStyle/>
           <a:p>
             <a:pPr>
-              <a:defRPr sz="2200" b="1">
+              <a:defRPr sz="2500" b="1">
                 <a:solidFill>
                   <a:srgbClr val="0F172A"/>
                 </a:solidFill>
@@ -8286,9 +8700,9 @@
               <a:spcBef>
                 <a:spcPts val="300"/>
               </a:spcBef>
-              <a:defRPr sz="1150">
-                <a:solidFill>
-                  <a:srgbClr val="64748B"/>
+              <a:defRPr sz="1300">
+                <a:solidFill>
+                  <a:srgbClr val="334155"/>
                 </a:solidFill>
               </a:defRPr>
             </a:pPr>
@@ -8307,7 +8721,7 @@
         <p:spPr>
           <a:xfrm>
             <a:off x="731520" y="1691640"/>
-            <a:ext cx="4846320" cy="4480560"/>
+            <a:ext cx="4937760" cy="4480560"/>
           </a:xfrm>
           <a:prstGeom prst="roundRect">
             <a:avLst/>
@@ -8315,9 +8729,9 @@
           <a:solidFill>
             <a:srgbClr val="FFFFFF"/>
           </a:solidFill>
-          <a:ln w="12700">
+          <a:ln w="15240">
             <a:solidFill>
-              <a:srgbClr val="E2E8F0"/>
+              <a:srgbClr val="DAE1EB"/>
             </a:solidFill>
           </a:ln>
         </p:spPr>
@@ -8352,7 +8766,7 @@
         <p:spPr>
           <a:xfrm>
             <a:off x="731520" y="1691640"/>
-            <a:ext cx="4846320" cy="73152"/>
+            <a:ext cx="4937760" cy="73152"/>
           </a:xfrm>
           <a:prstGeom prst="roundRect">
             <a:avLst/>
@@ -8394,8 +8808,8 @@
         </p:nvSpPr>
         <p:spPr>
           <a:xfrm>
-            <a:off x="932688" y="1874520"/>
-            <a:ext cx="4443984" cy="4160520"/>
+            <a:off x="950976" y="1874520"/>
+            <a:ext cx="4498848" cy="4160520"/>
           </a:xfrm>
           <a:prstGeom prst="rect">
             <a:avLst/>
@@ -8412,7 +8826,7 @@
               <a:spcAft>
                 <a:spcPts val="200"/>
               </a:spcAft>
-              <a:defRPr sz="900" b="1">
+              <a:defRPr sz="1000" b="1">
                 <a:solidFill>
                   <a:srgbClr val="4F46E5"/>
                 </a:solidFill>
@@ -8424,129 +8838,106 @@
           </a:p>
           <a:p>
             <a:pPr>
+              <a:spcAft>
+                <a:spcPts val="800"/>
+              </a:spcAft>
+              <a:defRPr sz="1600" b="1">
+                <a:solidFill>
+                  <a:srgbClr val="0F172A"/>
+                </a:solidFill>
+              </a:defRPr>
+            </a:pPr>
+            <a:r>
+              <a:t>Hyper-Local Regional Telemetry</a:t>
+            </a:r>
+          </a:p>
+          <a:p>
+            <a:pPr algn="l">
               <a:spcAft>
                 <a:spcPts val="700"/>
               </a:spcAft>
-              <a:defRPr sz="1400" b="1">
+            </a:pPr>
+            <a:r>
+              <a:rPr b="1" sz="1200">
                 <a:solidFill>
                   <a:srgbClr val="0F172A"/>
                 </a:solidFill>
-              </a:defRPr>
-            </a:pPr>
-            <a:r>
-              <a:t>Hyper-Local Regional Telemetry</a:t>
-            </a:r>
-          </a:p>
-          <a:p>
-            <a:pPr>
+              </a:rPr>
+              <a:t>•  High-Fidelity Vector TopoJSON: </a:t>
+            </a:r>
+            <a:r>
+              <a:rPr sz="1150">
+                <a:solidFill>
+                  <a:srgbClr val="334155"/>
+                </a:solidFill>
+              </a:rPr>
+              <a:t>Custom-crafted SVG district boundaries with clean, gapless polygon borders, eliminating geographic rendering distortion.</a:t>
+            </a:r>
+          </a:p>
+          <a:p>
+            <a:pPr algn="l">
               <a:spcAft>
-                <a:spcPts val="500"/>
+                <a:spcPts val="700"/>
               </a:spcAft>
             </a:pPr>
             <a:r>
-              <a:rPr b="1" sz="1050">
+              <a:rPr b="1" sz="1200">
                 <a:solidFill>
                   <a:srgbClr val="0F172A"/>
                 </a:solidFill>
               </a:rPr>
-              <a:t>• High-Fidelity Vector TopoJSON: </a:t>
-            </a:r>
-            <a:r>
-              <a:rPr sz="1000">
-                <a:solidFill>
-                  <a:srgbClr val="64748B"/>
-                </a:solidFill>
-              </a:rPr>
-              <a:t>Custom-crafted SVG district boundaries with clean, gapless polygon borders, eliminating geographic rendering distortion.</a:t>
-            </a:r>
-          </a:p>
-          <a:p>
-            <a:pPr>
+              <a:t>•  Real-World Hotspot Correlation: </a:t>
+            </a:r>
+            <a:r>
+              <a:rPr sz="1150">
+                <a:solidFill>
+                  <a:srgbClr val="334155"/>
+                </a:solidFill>
+              </a:rPr>
+              <a:t>Reflects real ground intelligence across known financial cybercrime hotspots including Jaipur, Bharatpur, Alwar, and Mewat border zones.</a:t>
+            </a:r>
+          </a:p>
+          <a:p>
+            <a:pPr algn="l">
               <a:spcAft>
-                <a:spcPts val="500"/>
+                <a:spcPts val="700"/>
               </a:spcAft>
             </a:pPr>
             <a:r>
-              <a:rPr b="1" sz="1050">
+              <a:rPr b="1" sz="1200">
                 <a:solidFill>
                   <a:srgbClr val="0F172A"/>
                 </a:solidFill>
               </a:rPr>
-              <a:t>• Real-World Hotspot Correlation: </a:t>
-            </a:r>
-            <a:r>
-              <a:rPr sz="1000">
-                <a:solidFill>
-                  <a:srgbClr val="64748B"/>
-                </a:solidFill>
-              </a:rPr>
-              <a:t>Reflects real ground intelligence across known financial cybercrime hotspots including Jaipur, Bharatpur, Alwar, and Mewat border zones.</a:t>
-            </a:r>
-          </a:p>
-          <a:p>
-            <a:pPr>
+              <a:t>•  Dynamic Hover &amp; Click Data Binding: </a:t>
+            </a:r>
+            <a:r>
+              <a:rPr sz="1150">
+                <a:solidFill>
+                  <a:srgbClr val="334155"/>
+                </a:solidFill>
+              </a:rPr>
+              <a:t>Interactive UI binds to live district metrics, displaying active cases, suspected mule accounts, flagged volume, and resolution rates.</a:t>
+            </a:r>
+          </a:p>
+          <a:p>
+            <a:pPr algn="l">
               <a:spcAft>
-                <a:spcPts val="500"/>
+                <a:spcPts val="700"/>
               </a:spcAft>
             </a:pPr>
             <a:r>
-              <a:rPr b="1" sz="1050">
+              <a:rPr b="1" sz="1200">
                 <a:solidFill>
                   <a:srgbClr val="0F172A"/>
                 </a:solidFill>
               </a:rPr>
-              <a:t>• Dynamic Hover &amp; Click Data Binding: </a:t>
-            </a:r>
-            <a:r>
-              <a:rPr sz="1000">
-                <a:solidFill>
-                  <a:srgbClr val="64748B"/>
-                </a:solidFill>
-              </a:rPr>
-              <a:t>Interactive UI binds to live district metrics, displaying active cases, suspected mule accounts, flagged volume, and resolution rates.</a:t>
-            </a:r>
-          </a:p>
-          <a:p>
-            <a:pPr>
-              <a:spcAft>
-                <a:spcPts val="500"/>
-              </a:spcAft>
-            </a:pPr>
-            <a:r>
-              <a:rPr b="1" sz="1050">
-                <a:solidFill>
-                  <a:srgbClr val="0F172A"/>
-                </a:solidFill>
-              </a:rPr>
-              <a:t>• Domain-Specific Analytics Table: </a:t>
-            </a:r>
-            <a:r>
-              <a:rPr sz="1000">
-                <a:solidFill>
-                  <a:srgbClr val="64748B"/>
-                </a:solidFill>
-              </a:rPr>
-              <a:t>Replaces generic loan metrics with actionable cyber metrics: 'Confirmed Mule Cases', 'Suspected Bank Accounts', and 'Lien Requests'.</a:t>
-            </a:r>
-          </a:p>
-          <a:p>
-            <a:pPr>
-              <a:spcAft>
-                <a:spcPts val="500"/>
-              </a:spcAft>
-            </a:pPr>
-            <a:r>
-              <a:rPr b="1" sz="1050">
-                <a:solidFill>
-                  <a:srgbClr val="0F172A"/>
-                </a:solidFill>
-              </a:rPr>
-              <a:t>• Tactical Law Enforcement Deployment: </a:t>
-            </a:r>
-            <a:r>
-              <a:rPr sz="1000">
-                <a:solidFill>
-                  <a:srgbClr val="64748B"/>
+              <a:t>•  Tactical Law Enforcement Deployment: </a:t>
+            </a:r>
+            <a:r>
+              <a:rPr sz="1150">
+                <a:solidFill>
+                  <a:srgbClr val="334155"/>
                 </a:solidFill>
               </a:rPr>
               <a:t>Enables State Cyber Police Headquarters to allocate investigative resources directly to emerging fraud epicenters.</a:t>
@@ -8562,8 +8953,8 @@
         </p:nvSpPr>
         <p:spPr>
           <a:xfrm>
-            <a:off x="5760720" y="1691640"/>
-            <a:ext cx="5699455" cy="4480560"/>
+            <a:off x="5852160" y="1691640"/>
+            <a:ext cx="5608015" cy="4480560"/>
           </a:xfrm>
           <a:prstGeom prst="roundRect">
             <a:avLst/>
@@ -8571,9 +8962,9 @@
           <a:solidFill>
             <a:srgbClr val="FFFFFF"/>
           </a:solidFill>
-          <a:ln w="12700">
+          <a:ln w="15240">
             <a:solidFill>
-              <a:srgbClr val="E2E8F0"/>
+              <a:srgbClr val="DAE1EB"/>
             </a:solidFill>
           </a:ln>
         </p:spPr>
@@ -8615,8 +9006,8 @@
         </p:blipFill>
         <p:spPr>
           <a:xfrm>
-            <a:off x="5870448" y="1801368"/>
-            <a:ext cx="5479999" cy="3941064"/>
+            <a:off x="5961888" y="1801368"/>
+            <a:ext cx="5388559" cy="3913632"/>
           </a:xfrm>
           <a:prstGeom prst="rect">
             <a:avLst/>
@@ -8631,8 +9022,8 @@
         </p:nvSpPr>
         <p:spPr>
           <a:xfrm>
-            <a:off x="5870448" y="5815584"/>
-            <a:ext cx="5479999" cy="320040"/>
+            <a:off x="5961888" y="5788152"/>
+            <a:ext cx="5388559" cy="347472"/>
           </a:xfrm>
           <a:prstGeom prst="rect">
             <a:avLst/>
@@ -8646,7 +9037,7 @@
           <a:lstStyle/>
           <a:p>
             <a:pPr algn="ctr">
-              <a:defRPr sz="950" b="1">
+              <a:defRPr sz="1100" b="1">
                 <a:solidFill>
                   <a:srgbClr val="4F46E5"/>
                 </a:solidFill>
@@ -8681,9 +9072,9 @@
           <a:lstStyle/>
           <a:p>
             <a:pPr algn="l">
-              <a:defRPr sz="900">
-                <a:solidFill>
-                  <a:srgbClr val="64748B"/>
+              <a:defRPr sz="950">
+                <a:solidFill>
+                  <a:srgbClr val="334155"/>
                 </a:solidFill>
               </a:defRPr>
             </a:pPr>
@@ -8716,7 +9107,7 @@
           <a:lstStyle/>
           <a:p>
             <a:pPr algn="r">
-              <a:defRPr sz="900" b="1">
+              <a:defRPr sz="950" b="1">
                 <a:solidFill>
                   <a:srgbClr val="4F46E5"/>
                 </a:solidFill>
@@ -8797,8 +9188,8 @@
         </p:nvSpPr>
         <p:spPr>
           <a:xfrm>
-            <a:off x="731520" y="365760"/>
-            <a:ext cx="4389120" cy="292608"/>
+            <a:off x="731520" y="347472"/>
+            <a:ext cx="4572000" cy="320040"/>
           </a:xfrm>
           <a:prstGeom prst="roundRect">
             <a:avLst/>
@@ -8806,7 +9197,7 @@
           <a:solidFill>
             <a:srgbClr val="EEF2FF"/>
           </a:solidFill>
-          <a:ln w="12700">
+          <a:ln w="15240">
             <a:solidFill>
               <a:srgbClr val="4F46E5"/>
             </a:solidFill>
@@ -8831,14 +9222,14 @@
           <a:lstStyle/>
           <a:p>
             <a:pPr algn="ctr">
-              <a:defRPr sz="900" b="1">
+              <a:defRPr sz="950" b="1">
                 <a:solidFill>
                   <a:srgbClr val="4F46E5"/>
                 </a:solidFill>
               </a:defRPr>
             </a:pPr>
             <a:r>
-              <a:t>CORE CAPABILITY 4 · LAW ENFORCEMENT INTERDICTION</a:t>
+              <a:t>  CORE CAPABILITY 4 · LAW ENFORCEMENT INTERDICTION  </a:t>
             </a:r>
           </a:p>
         </p:txBody>
@@ -8851,8 +9242,8 @@
         </p:nvSpPr>
         <p:spPr>
           <a:xfrm>
-            <a:off x="731520" y="731520"/>
-            <a:ext cx="10728655" cy="868680"/>
+            <a:off x="731520" y="713232"/>
+            <a:ext cx="10728655" cy="896112"/>
           </a:xfrm>
           <a:prstGeom prst="rect">
             <a:avLst/>
@@ -8866,7 +9257,7 @@
           <a:lstStyle/>
           <a:p>
             <a:pPr>
-              <a:defRPr sz="2200" b="1">
+              <a:defRPr sz="2500" b="1">
                 <a:solidFill>
                   <a:srgbClr val="0F172A"/>
                 </a:solidFill>
@@ -8881,9 +9272,9 @@
               <a:spcBef>
                 <a:spcPts val="300"/>
               </a:spcBef>
-              <a:defRPr sz="1150">
-                <a:solidFill>
-                  <a:srgbClr val="64748B"/>
+              <a:defRPr sz="1300">
+                <a:solidFill>
+                  <a:srgbClr val="334155"/>
                 </a:solidFill>
               </a:defRPr>
             </a:pPr>
@@ -8902,7 +9293,7 @@
         <p:spPr>
           <a:xfrm>
             <a:off x="731520" y="1691640"/>
-            <a:ext cx="4846320" cy="4480560"/>
+            <a:ext cx="4937760" cy="4480560"/>
           </a:xfrm>
           <a:prstGeom prst="roundRect">
             <a:avLst/>
@@ -8910,9 +9301,9 @@
           <a:solidFill>
             <a:srgbClr val="FFFFFF"/>
           </a:solidFill>
-          <a:ln w="12700">
+          <a:ln w="15240">
             <a:solidFill>
-              <a:srgbClr val="E2E8F0"/>
+              <a:srgbClr val="DAE1EB"/>
             </a:solidFill>
           </a:ln>
         </p:spPr>
@@ -8947,7 +9338,7 @@
         <p:spPr>
           <a:xfrm>
             <a:off x="731520" y="1691640"/>
-            <a:ext cx="4846320" cy="73152"/>
+            <a:ext cx="4937760" cy="73152"/>
           </a:xfrm>
           <a:prstGeom prst="roundRect">
             <a:avLst/>
@@ -8989,8 +9380,8 @@
         </p:nvSpPr>
         <p:spPr>
           <a:xfrm>
-            <a:off x="932688" y="1874520"/>
-            <a:ext cx="4443984" cy="4160520"/>
+            <a:off x="950976" y="1874520"/>
+            <a:ext cx="4498848" cy="4160520"/>
           </a:xfrm>
           <a:prstGeom prst="rect">
             <a:avLst/>
@@ -9007,7 +9398,7 @@
               <a:spcAft>
                 <a:spcPts val="200"/>
               </a:spcAft>
-              <a:defRPr sz="900" b="1">
+              <a:defRPr sz="1000" b="1">
                 <a:solidFill>
                   <a:srgbClr val="10B981"/>
                 </a:solidFill>
@@ -9019,132 +9410,109 @@
           </a:p>
           <a:p>
             <a:pPr>
+              <a:spcAft>
+                <a:spcPts val="800"/>
+              </a:spcAft>
+              <a:defRPr sz="1600" b="1">
+                <a:solidFill>
+                  <a:srgbClr val="0F172A"/>
+                </a:solidFill>
+              </a:defRPr>
+            </a:pPr>
+            <a:r>
+              <a:t>Operational Enforcement Pipeline</a:t>
+            </a:r>
+          </a:p>
+          <a:p>
+            <a:pPr algn="l">
               <a:spcAft>
                 <a:spcPts val="700"/>
               </a:spcAft>
-              <a:defRPr sz="1400" b="1">
+            </a:pPr>
+            <a:r>
+              <a:rPr b="1" sz="1200">
                 <a:solidFill>
                   <a:srgbClr val="0F172A"/>
                 </a:solidFill>
-              </a:defRPr>
-            </a:pPr>
-            <a:r>
-              <a:t>Operational Enforcement Pipeline</a:t>
-            </a:r>
-          </a:p>
-          <a:p>
-            <a:pPr>
+              </a:rPr>
+              <a:t>•  Dedicated Nodal Dispatch Queue: </a:t>
+            </a:r>
+            <a:r>
+              <a:rPr sz="1150">
+                <a:solidFill>
+                  <a:srgbClr val="334155"/>
+                </a:solidFill>
+              </a:rPr>
+              <a:t>Confirmed fraud cases move automatically from general investigation into a dedicated 'Cyber Cell Dispatch' operational queue.</a:t>
+            </a:r>
+          </a:p>
+          <a:p>
+            <a:pPr algn="l">
               <a:spcAft>
-                <a:spcPts val="500"/>
+                <a:spcPts val="700"/>
               </a:spcAft>
             </a:pPr>
             <a:r>
-              <a:rPr b="1" sz="1050">
+              <a:rPr b="1" sz="1200">
                 <a:solidFill>
                   <a:srgbClr val="0F172A"/>
                 </a:solidFill>
               </a:rPr>
-              <a:t>• Dedicated Nodal Dispatch Queue: </a:t>
-            </a:r>
-            <a:r>
-              <a:rPr sz="1000">
-                <a:solidFill>
-                  <a:srgbClr val="64748B"/>
-                </a:solidFill>
-              </a:rPr>
-              <a:t>Confirmed fraud cases move automatically from general investigation into a dedicated 'Cyber Cell Dispatch' operational queue.</a:t>
-            </a:r>
-          </a:p>
-          <a:p>
-            <a:pPr>
+              <a:t>•  Automated Evidence Dossier (PDF): </a:t>
+            </a:r>
+            <a:r>
+              <a:rPr sz="1150">
+                <a:solidFill>
+                  <a:srgbClr val="334155"/>
+                </a:solidFill>
+              </a:rPr>
+              <a:t>Generates standardized judicial evidence dossiers featuring post URLs, origin IP addresses, actor handles, and device user-agents.</a:t>
+            </a:r>
+          </a:p>
+          <a:p>
+            <a:pPr algn="l">
               <a:spcAft>
-                <a:spcPts val="500"/>
+                <a:spcPts val="700"/>
               </a:spcAft>
             </a:pPr>
             <a:r>
-              <a:rPr b="1" sz="1050">
+              <a:rPr b="1" sz="1200">
                 <a:solidFill>
                   <a:srgbClr val="0F172A"/>
                 </a:solidFill>
               </a:rPr>
-              <a:t>• Automated Evidence Dossier (PDF): </a:t>
-            </a:r>
-            <a:r>
-              <a:rPr sz="1000">
-                <a:solidFill>
-                  <a:srgbClr val="64748B"/>
-                </a:solidFill>
-              </a:rPr>
-              <a:t>Generates standardized judicial evidence dossiers featuring post URLs, origin IP addresses, actor handles, and device user-agents.</a:t>
-            </a:r>
-          </a:p>
-          <a:p>
-            <a:pPr>
+              <a:t>•  Cryptographic SHA-256 Proof: </a:t>
+            </a:r>
+            <a:r>
+              <a:rPr sz="1150">
+                <a:solidFill>
+                  <a:srgbClr val="334155"/>
+                </a:solidFill>
+              </a:rPr>
+              <a:t>Every generated report seals raw evidence with SHA-256 checksums to satisfy Section 65B Indian Evidence Act standards.</a:t>
+            </a:r>
+          </a:p>
+          <a:p>
+            <a:pPr algn="l">
               <a:spcAft>
-                <a:spcPts val="500"/>
+                <a:spcPts val="700"/>
               </a:spcAft>
             </a:pPr>
             <a:r>
-              <a:rPr b="1" sz="1050">
+              <a:rPr b="1" sz="1200">
                 <a:solidFill>
                   <a:srgbClr val="0F172A"/>
                 </a:solidFill>
               </a:rPr>
-              <a:t>• Cryptographic SHA-256 Proof: </a:t>
-            </a:r>
-            <a:r>
-              <a:rPr sz="1000">
-                <a:solidFill>
-                  <a:srgbClr val="64748B"/>
-                </a:solidFill>
-              </a:rPr>
-              <a:t>Every generated report seals raw evidence with SHA-256 checksums to satisfy Section 65B Indian Evidence Act standards.</a:t>
-            </a:r>
-          </a:p>
-          <a:p>
-            <a:pPr>
-              <a:spcAft>
-                <a:spcPts val="500"/>
-              </a:spcAft>
-            </a:pPr>
-            <a:r>
-              <a:rPr b="1" sz="1050">
-                <a:solidFill>
-                  <a:srgbClr val="0F172A"/>
-                </a:solidFill>
-              </a:rPr>
-              <a:t>• 1-Click Simulated Dispatches: </a:t>
-            </a:r>
-            <a:r>
-              <a:rPr sz="1000">
-                <a:solidFill>
-                  <a:srgbClr val="64748B"/>
+              <a:t>•  1-Click Simulated Dispatches: </a:t>
+            </a:r>
+            <a:r>
+              <a:rPr sz="1150">
+                <a:solidFill>
+                  <a:srgbClr val="334155"/>
                 </a:solidFill>
               </a:rPr>
               <a:t>Direct webhook dispatches to the National Cyber Crime Reporting Portal (I4C) and automated bank account lien freeze notices.</a:t>
-            </a:r>
-          </a:p>
-          <a:p>
-            <a:pPr>
-              <a:spcAft>
-                <a:spcPts val="500"/>
-              </a:spcAft>
-            </a:pPr>
-            <a:r>
-              <a:rPr b="1" sz="1050">
-                <a:solidFill>
-                  <a:srgbClr val="0F172A"/>
-                </a:solidFill>
-              </a:rPr>
-              <a:t>• Reversal Guardrails ('Revert to Draft'): </a:t>
-            </a:r>
-            <a:r>
-              <a:rPr sz="1000">
-                <a:solidFill>
-                  <a:srgbClr val="64748B"/>
-                </a:solidFill>
-              </a:rPr>
-              <a:t>Built-in safety state machine allows officers to instantly reverse accidental confirmations with zero audit trail corruption.</a:t>
             </a:r>
           </a:p>
         </p:txBody>
@@ -9157,8 +9525,8 @@
         </p:nvSpPr>
         <p:spPr>
           <a:xfrm>
-            <a:off x="5760720" y="1691640"/>
-            <a:ext cx="5699455" cy="4480560"/>
+            <a:off x="5852160" y="1691640"/>
+            <a:ext cx="5608015" cy="4480560"/>
           </a:xfrm>
           <a:prstGeom prst="roundRect">
             <a:avLst/>
@@ -9166,9 +9534,9 @@
           <a:solidFill>
             <a:srgbClr val="FFFFFF"/>
           </a:solidFill>
-          <a:ln w="12700">
+          <a:ln w="15240">
             <a:solidFill>
-              <a:srgbClr val="E2E8F0"/>
+              <a:srgbClr val="DAE1EB"/>
             </a:solidFill>
           </a:ln>
         </p:spPr>
@@ -9210,8 +9578,8 @@
         </p:blipFill>
         <p:spPr>
           <a:xfrm>
-            <a:off x="5870448" y="1801368"/>
-            <a:ext cx="5479999" cy="3941064"/>
+            <a:off x="5961888" y="1801368"/>
+            <a:ext cx="5388559" cy="3913632"/>
           </a:xfrm>
           <a:prstGeom prst="rect">
             <a:avLst/>
@@ -9226,8 +9594,8 @@
         </p:nvSpPr>
         <p:spPr>
           <a:xfrm>
-            <a:off x="5870448" y="5815584"/>
-            <a:ext cx="5479999" cy="320040"/>
+            <a:off x="5961888" y="5788152"/>
+            <a:ext cx="5388559" cy="347472"/>
           </a:xfrm>
           <a:prstGeom prst="rect">
             <a:avLst/>
@@ -9241,7 +9609,7 @@
           <a:lstStyle/>
           <a:p>
             <a:pPr algn="ctr">
-              <a:defRPr sz="950" b="1">
+              <a:defRPr sz="1100" b="1">
                 <a:solidFill>
                   <a:srgbClr val="4F46E5"/>
                 </a:solidFill>
@@ -9276,9 +9644,9 @@
           <a:lstStyle/>
           <a:p>
             <a:pPr algn="l">
-              <a:defRPr sz="900">
-                <a:solidFill>
-                  <a:srgbClr val="64748B"/>
+              <a:defRPr sz="950">
+                <a:solidFill>
+                  <a:srgbClr val="334155"/>
                 </a:solidFill>
               </a:defRPr>
             </a:pPr>
@@ -9311,7 +9679,7 @@
           <a:lstStyle/>
           <a:p>
             <a:pPr algn="r">
-              <a:defRPr sz="900" b="1">
+              <a:defRPr sz="950" b="1">
                 <a:solidFill>
                   <a:srgbClr val="4F46E5"/>
                 </a:solidFill>
@@ -9392,8 +9760,8 @@
         </p:nvSpPr>
         <p:spPr>
           <a:xfrm>
-            <a:off x="731520" y="365760"/>
-            <a:ext cx="4389120" cy="292608"/>
+            <a:off x="731520" y="347472"/>
+            <a:ext cx="4572000" cy="320040"/>
           </a:xfrm>
           <a:prstGeom prst="roundRect">
             <a:avLst/>
@@ -9401,7 +9769,7 @@
           <a:solidFill>
             <a:srgbClr val="EEF2FF"/>
           </a:solidFill>
-          <a:ln w="12700">
+          <a:ln w="15240">
             <a:solidFill>
               <a:srgbClr val="4F46E5"/>
             </a:solidFill>
@@ -9426,14 +9794,14 @@
           <a:lstStyle/>
           <a:p>
             <a:pPr algn="ctr">
-              <a:defRPr sz="900" b="1">
+              <a:defRPr sz="950" b="1">
                 <a:solidFill>
                   <a:srgbClr val="4F46E5"/>
                 </a:solidFill>
               </a:defRPr>
             </a:pPr>
             <a:r>
-              <a:t>IMPACT &amp; FORENSIC SYNERGY · OPERATIONAL METRICS</a:t>
+              <a:t>  IMPACT &amp; FORENSIC SYNERGY · OPERATIONAL METRICS  </a:t>
             </a:r>
           </a:p>
         </p:txBody>
@@ -9446,8 +9814,8 @@
         </p:nvSpPr>
         <p:spPr>
           <a:xfrm>
-            <a:off x="731520" y="731520"/>
-            <a:ext cx="10728655" cy="868680"/>
+            <a:off x="731520" y="713232"/>
+            <a:ext cx="10728655" cy="896112"/>
           </a:xfrm>
           <a:prstGeom prst="rect">
             <a:avLst/>
@@ -9461,7 +9829,7 @@
           <a:lstStyle/>
           <a:p>
             <a:pPr>
-              <a:defRPr sz="2200" b="1">
+              <a:defRPr sz="2500" b="1">
                 <a:solidFill>
                   <a:srgbClr val="0F172A"/>
                 </a:solidFill>
@@ -9476,9 +9844,9 @@
               <a:spcBef>
                 <a:spcPts val="300"/>
               </a:spcBef>
-              <a:defRPr sz="1150">
-                <a:solidFill>
-                  <a:srgbClr val="64748B"/>
+              <a:defRPr sz="1300">
+                <a:solidFill>
+                  <a:srgbClr val="334155"/>
                 </a:solidFill>
               </a:defRPr>
             </a:pPr>
@@ -9497,7 +9865,7 @@
         <p:spPr>
           <a:xfrm>
             <a:off x="731520" y="1691640"/>
-            <a:ext cx="4846320" cy="4480560"/>
+            <a:ext cx="4937760" cy="4480560"/>
           </a:xfrm>
           <a:prstGeom prst="roundRect">
             <a:avLst/>
@@ -9505,9 +9873,9 @@
           <a:solidFill>
             <a:srgbClr val="FFFFFF"/>
           </a:solidFill>
-          <a:ln w="12700">
+          <a:ln w="15240">
             <a:solidFill>
-              <a:srgbClr val="E2E8F0"/>
+              <a:srgbClr val="DAE1EB"/>
             </a:solidFill>
           </a:ln>
         </p:spPr>
@@ -9542,7 +9910,7 @@
         <p:spPr>
           <a:xfrm>
             <a:off x="731520" y="1691640"/>
-            <a:ext cx="4846320" cy="73152"/>
+            <a:ext cx="4937760" cy="73152"/>
           </a:xfrm>
           <a:prstGeom prst="roundRect">
             <a:avLst/>
@@ -9584,8 +9952,8 @@
         </p:nvSpPr>
         <p:spPr>
           <a:xfrm>
-            <a:off x="932688" y="1874520"/>
-            <a:ext cx="4443984" cy="4160520"/>
+            <a:off x="950976" y="1874520"/>
+            <a:ext cx="4498848" cy="4160520"/>
           </a:xfrm>
           <a:prstGeom prst="rect">
             <a:avLst/>
@@ -9602,7 +9970,7 @@
               <a:spcAft>
                 <a:spcPts val="200"/>
               </a:spcAft>
-              <a:defRPr sz="900" b="1">
+              <a:defRPr sz="1000" b="1">
                 <a:solidFill>
                   <a:srgbClr val="4F46E5"/>
                 </a:solidFill>
@@ -9614,129 +9982,106 @@
           </a:p>
           <a:p>
             <a:pPr>
+              <a:spcAft>
+                <a:spcPts val="800"/>
+              </a:spcAft>
+              <a:defRPr sz="1600" b="1">
+                <a:solidFill>
+                  <a:srgbClr val="0F172A"/>
+                </a:solidFill>
+              </a:defRPr>
+            </a:pPr>
+            <a:r>
+              <a:t>Quantifiable Operational Advantage</a:t>
+            </a:r>
+          </a:p>
+          <a:p>
+            <a:pPr algn="l">
               <a:spcAft>
                 <a:spcPts val="700"/>
               </a:spcAft>
-              <a:defRPr sz="1400" b="1">
+            </a:pPr>
+            <a:r>
+              <a:rPr b="1" sz="1200">
                 <a:solidFill>
                   <a:srgbClr val="0F172A"/>
                 </a:solidFill>
-              </a:defRPr>
-            </a:pPr>
-            <a:r>
-              <a:t>Quantifiable Operational Advantage</a:t>
-            </a:r>
-          </a:p>
-          <a:p>
-            <a:pPr>
+              </a:rPr>
+              <a:t>•  &gt;85% Reduction in Triage Time: </a:t>
+            </a:r>
+            <a:r>
+              <a:rPr sz="1150">
+                <a:solidFill>
+                  <a:srgbClr val="334155"/>
+                </a:solidFill>
+              </a:rPr>
+              <a:t>Reduces incident verification timelines from 48-72 hours of manual searching to under 3 minutes per flagged advertisement.</a:t>
+            </a:r>
+          </a:p>
+          <a:p>
+            <a:pPr algn="l">
               <a:spcAft>
-                <a:spcPts val="500"/>
+                <a:spcPts val="700"/>
               </a:spcAft>
             </a:pPr>
             <a:r>
-              <a:rPr b="1" sz="1050">
+              <a:rPr b="1" sz="1200">
                 <a:solidFill>
                   <a:srgbClr val="0F172A"/>
                 </a:solidFill>
               </a:rPr>
-              <a:t>• &gt;85% Reduction in Triage Time: </a:t>
-            </a:r>
-            <a:r>
-              <a:rPr sz="1000">
-                <a:solidFill>
-                  <a:srgbClr val="64748B"/>
-                </a:solidFill>
-              </a:rPr>
-              <a:t>Reduces incident verification timelines from 48-72 hours of manual searching to under 3 minutes per flagged advertisement.</a:t>
-            </a:r>
-          </a:p>
-          <a:p>
-            <a:pPr>
+              <a:t>•  Mule Syndicate Linkage Graph: </a:t>
+            </a:r>
+            <a:r>
+              <a:rPr sz="1150">
+                <a:solidFill>
+                  <a:srgbClr val="334155"/>
+                </a:solidFill>
+              </a:rPr>
+              <a:t>Force-directed visual graph uncovers shared UPI handles, phone numbers, and Telegram channels linking disparate mule accounts.</a:t>
+            </a:r>
+          </a:p>
+          <a:p>
+            <a:pPr algn="l">
               <a:spcAft>
-                <a:spcPts val="500"/>
+                <a:spcPts val="700"/>
               </a:spcAft>
             </a:pPr>
             <a:r>
-              <a:rPr b="1" sz="1050">
+              <a:rPr b="1" sz="1200">
                 <a:solidFill>
                   <a:srgbClr val="0F172A"/>
                 </a:solidFill>
               </a:rPr>
-              <a:t>• Mule Syndicate Linkage Graph: </a:t>
-            </a:r>
-            <a:r>
-              <a:rPr sz="1000">
-                <a:solidFill>
-                  <a:srgbClr val="64748B"/>
-                </a:solidFill>
-              </a:rPr>
-              <a:t>Force-directed visual graph uncovers shared UPI handles, phone numbers, and Telegram channels linking disparate mule accounts.</a:t>
-            </a:r>
-          </a:p>
-          <a:p>
-            <a:pPr>
+              <a:t>•  Digital Chain of Custody: </a:t>
+            </a:r>
+            <a:r>
+              <a:rPr sz="1150">
+                <a:solidFill>
+                  <a:srgbClr val="334155"/>
+                </a:solidFill>
+              </a:rPr>
+              <a:t>Immutable digital audit trail records timestamps, examiner actions, and state transitions for courtroom presentation.</a:t>
+            </a:r>
+          </a:p>
+          <a:p>
+            <a:pPr algn="l">
               <a:spcAft>
-                <a:spcPts val="500"/>
+                <a:spcPts val="700"/>
               </a:spcAft>
             </a:pPr>
             <a:r>
-              <a:rPr b="1" sz="1050">
+              <a:rPr b="1" sz="1200">
                 <a:solidFill>
                   <a:srgbClr val="0F172A"/>
                 </a:solidFill>
               </a:rPr>
-              <a:t>• Digital Chain of Custody: </a:t>
-            </a:r>
-            <a:r>
-              <a:rPr sz="1000">
-                <a:solidFill>
-                  <a:srgbClr val="64748B"/>
-                </a:solidFill>
-              </a:rPr>
-              <a:t>Immutable digital audit trail records timestamps, examiner actions, and state transitions for courtroom presentation.</a:t>
-            </a:r>
-          </a:p>
-          <a:p>
-            <a:pPr>
-              <a:spcAft>
-                <a:spcPts val="500"/>
-              </a:spcAft>
-            </a:pPr>
-            <a:r>
-              <a:rPr b="1" sz="1050">
-                <a:solidFill>
-                  <a:srgbClr val="0F172A"/>
-                </a:solidFill>
-              </a:rPr>
-              <a:t>• Inter-Agency Collaboration: </a:t>
-            </a:r>
-            <a:r>
-              <a:rPr sz="1000">
-                <a:solidFill>
-                  <a:srgbClr val="64748B"/>
-                </a:solidFill>
-              </a:rPr>
-              <a:t>Standardized JSON/PDF export formats allow seamless intelligence exchange between State Cyber Cells and Nodal Bank Officers.</a:t>
-            </a:r>
-          </a:p>
-          <a:p>
-            <a:pPr>
-              <a:spcAft>
-                <a:spcPts val="500"/>
-              </a:spcAft>
-            </a:pPr>
-            <a:r>
-              <a:rPr b="1" sz="1050">
-                <a:solidFill>
-                  <a:srgbClr val="0F172A"/>
-                </a:solidFill>
-              </a:rPr>
-              <a:t>• Proactive Threat Neutralization: </a:t>
-            </a:r>
-            <a:r>
-              <a:rPr sz="1000">
-                <a:solidFill>
-                  <a:srgbClr val="64748B"/>
+              <a:t>•  Proactive Threat Neutralization: </a:t>
+            </a:r>
+            <a:r>
+              <a:rPr sz="1150">
+                <a:solidFill>
+                  <a:srgbClr val="334155"/>
                 </a:solidFill>
               </a:rPr>
               <a:t>Freezes mule bank accounts before dirty scam funds can be layered or cashed out at ATMs.</a:t>
@@ -9752,8 +10097,8 @@
         </p:nvSpPr>
         <p:spPr>
           <a:xfrm>
-            <a:off x="5760720" y="1691640"/>
-            <a:ext cx="5699455" cy="4480560"/>
+            <a:off x="5852160" y="1691640"/>
+            <a:ext cx="5608015" cy="4480560"/>
           </a:xfrm>
           <a:prstGeom prst="roundRect">
             <a:avLst/>
@@ -9761,9 +10106,9 @@
           <a:solidFill>
             <a:srgbClr val="FFFFFF"/>
           </a:solidFill>
-          <a:ln w="12700">
+          <a:ln w="15240">
             <a:solidFill>
-              <a:srgbClr val="E2E8F0"/>
+              <a:srgbClr val="DAE1EB"/>
             </a:solidFill>
           </a:ln>
         </p:spPr>
@@ -9805,8 +10150,8 @@
         </p:blipFill>
         <p:spPr>
           <a:xfrm>
-            <a:off x="5870448" y="1801368"/>
-            <a:ext cx="5479999" cy="3941064"/>
+            <a:off x="5961888" y="1801368"/>
+            <a:ext cx="5388559" cy="3913632"/>
           </a:xfrm>
           <a:prstGeom prst="rect">
             <a:avLst/>
@@ -9821,8 +10166,8 @@
         </p:nvSpPr>
         <p:spPr>
           <a:xfrm>
-            <a:off x="5870448" y="5815584"/>
-            <a:ext cx="5479999" cy="320040"/>
+            <a:off x="5961888" y="5788152"/>
+            <a:ext cx="5388559" cy="347472"/>
           </a:xfrm>
           <a:prstGeom prst="rect">
             <a:avLst/>
@@ -9836,7 +10181,7 @@
           <a:lstStyle/>
           <a:p>
             <a:pPr algn="ctr">
-              <a:defRPr sz="950" b="1">
+              <a:defRPr sz="1100" b="1">
                 <a:solidFill>
                   <a:srgbClr val="4F46E5"/>
                 </a:solidFill>
@@ -9871,9 +10216,9 @@
           <a:lstStyle/>
           <a:p>
             <a:pPr algn="l">
-              <a:defRPr sz="900">
-                <a:solidFill>
-                  <a:srgbClr val="64748B"/>
+              <a:defRPr sz="950">
+                <a:solidFill>
+                  <a:srgbClr val="334155"/>
                 </a:solidFill>
               </a:defRPr>
             </a:pPr>
@@ -9906,7 +10251,7 @@
           <a:lstStyle/>
           <a:p>
             <a:pPr algn="r">
-              <a:defRPr sz="900" b="1">
+              <a:defRPr sz="950" b="1">
                 <a:solidFill>
                   <a:srgbClr val="4F46E5"/>
                 </a:solidFill>
